--- a/문대진_포트폴리오.pptx
+++ b/문대진_포트폴리오.pptx
@@ -17,11 +17,11 @@
     <p:sldId id="259" r:id="rId5"/>
     <p:sldId id="260" r:id="rId6"/>
     <p:sldId id="268" r:id="rId7"/>
-    <p:sldId id="264" r:id="rId8"/>
-    <p:sldId id="263" r:id="rId9"/>
-    <p:sldId id="266" r:id="rId10"/>
-    <p:sldId id="262" r:id="rId11"/>
-    <p:sldId id="267" r:id="rId12"/>
+    <p:sldId id="267" r:id="rId8"/>
+    <p:sldId id="264" r:id="rId9"/>
+    <p:sldId id="263" r:id="rId10"/>
+    <p:sldId id="266" r:id="rId11"/>
+    <p:sldId id="262" r:id="rId12"/>
   </p:sldIdLst>
   <p:sldSz cx="14257338" cy="8020050"/>
   <p:notesSz cx="6858000" cy="9144000"/>
@@ -241,7 +241,7 @@
           <a:p>
             <a:fld id="{14BE6AFD-91E3-45AD-A05A-572BFF058F8E}" type="datetimeFigureOut">
               <a:rPr lang="ko-KR" altLang="en-US" smtClean="0"/>
-              <a:t>2025-08-01</a:t>
+              <a:t>08-01(Fri)</a:t>
             </a:fld>
             <a:endParaRPr lang="ko-KR" altLang="en-US"/>
           </a:p>
@@ -418,7 +418,7 @@
           <a:p>
             <a:fld id="{B10E417E-C2EC-425C-B420-CF724443A5AE}" type="datetimeFigureOut">
               <a:rPr lang="ko-KR" altLang="en-US" smtClean="0"/>
-              <a:t>2025-08-01</a:t>
+              <a:t>08-01(Fri)</a:t>
             </a:fld>
             <a:endParaRPr lang="ko-KR" altLang="en-US"/>
           </a:p>
@@ -900,7 +900,7 @@
           <a:p>
             <a:fld id="{C6A72A79-3CD5-45FF-B4A2-CB727F17E6E3}" type="datetimeFigureOut">
               <a:rPr lang="ko-KR" altLang="en-US" smtClean="0"/>
-              <a:t>2025-08-01</a:t>
+              <a:t>08-01(Fri)</a:t>
             </a:fld>
             <a:endParaRPr lang="ko-KR" altLang="en-US"/>
           </a:p>
@@ -1070,7 +1070,7 @@
           <a:p>
             <a:fld id="{C6A72A79-3CD5-45FF-B4A2-CB727F17E6E3}" type="datetimeFigureOut">
               <a:rPr lang="ko-KR" altLang="en-US" smtClean="0"/>
-              <a:t>2025-08-01</a:t>
+              <a:t>08-01(Fri)</a:t>
             </a:fld>
             <a:endParaRPr lang="ko-KR" altLang="en-US"/>
           </a:p>
@@ -1250,7 +1250,7 @@
           <a:p>
             <a:fld id="{C6A72A79-3CD5-45FF-B4A2-CB727F17E6E3}" type="datetimeFigureOut">
               <a:rPr lang="ko-KR" altLang="en-US" smtClean="0"/>
-              <a:t>2025-08-01</a:t>
+              <a:t>08-01(Fri)</a:t>
             </a:fld>
             <a:endParaRPr lang="ko-KR" altLang="en-US"/>
           </a:p>
@@ -1420,7 +1420,7 @@
           <a:p>
             <a:fld id="{C6A72A79-3CD5-45FF-B4A2-CB727F17E6E3}" type="datetimeFigureOut">
               <a:rPr lang="ko-KR" altLang="en-US" smtClean="0"/>
-              <a:t>2025-08-01</a:t>
+              <a:t>08-01(Fri)</a:t>
             </a:fld>
             <a:endParaRPr lang="ko-KR" altLang="en-US"/>
           </a:p>
@@ -1666,7 +1666,7 @@
           <a:p>
             <a:fld id="{C6A72A79-3CD5-45FF-B4A2-CB727F17E6E3}" type="datetimeFigureOut">
               <a:rPr lang="ko-KR" altLang="en-US" smtClean="0"/>
-              <a:t>2025-08-01</a:t>
+              <a:t>08-01(Fri)</a:t>
             </a:fld>
             <a:endParaRPr lang="ko-KR" altLang="en-US"/>
           </a:p>
@@ -1898,7 +1898,7 @@
           <a:p>
             <a:fld id="{C6A72A79-3CD5-45FF-B4A2-CB727F17E6E3}" type="datetimeFigureOut">
               <a:rPr lang="ko-KR" altLang="en-US" smtClean="0"/>
-              <a:t>2025-08-01</a:t>
+              <a:t>08-01(Fri)</a:t>
             </a:fld>
             <a:endParaRPr lang="ko-KR" altLang="en-US"/>
           </a:p>
@@ -2265,7 +2265,7 @@
           <a:p>
             <a:fld id="{C6A72A79-3CD5-45FF-B4A2-CB727F17E6E3}" type="datetimeFigureOut">
               <a:rPr lang="ko-KR" altLang="en-US" smtClean="0"/>
-              <a:t>2025-08-01</a:t>
+              <a:t>08-01(Fri)</a:t>
             </a:fld>
             <a:endParaRPr lang="ko-KR" altLang="en-US"/>
           </a:p>
@@ -2383,7 +2383,7 @@
           <a:p>
             <a:fld id="{C6A72A79-3CD5-45FF-B4A2-CB727F17E6E3}" type="datetimeFigureOut">
               <a:rPr lang="ko-KR" altLang="en-US" smtClean="0"/>
-              <a:t>2025-08-01</a:t>
+              <a:t>08-01(Fri)</a:t>
             </a:fld>
             <a:endParaRPr lang="ko-KR" altLang="en-US"/>
           </a:p>
@@ -2478,7 +2478,7 @@
           <a:p>
             <a:fld id="{C6A72A79-3CD5-45FF-B4A2-CB727F17E6E3}" type="datetimeFigureOut">
               <a:rPr lang="ko-KR" altLang="en-US" smtClean="0"/>
-              <a:t>2025-08-01</a:t>
+              <a:t>08-01(Fri)</a:t>
             </a:fld>
             <a:endParaRPr lang="ko-KR" altLang="en-US"/>
           </a:p>
@@ -2755,7 +2755,7 @@
           <a:p>
             <a:fld id="{C6A72A79-3CD5-45FF-B4A2-CB727F17E6E3}" type="datetimeFigureOut">
               <a:rPr lang="ko-KR" altLang="en-US" smtClean="0"/>
-              <a:t>2025-08-01</a:t>
+              <a:t>08-01(Fri)</a:t>
             </a:fld>
             <a:endParaRPr lang="ko-KR" altLang="en-US"/>
           </a:p>
@@ -3012,7 +3012,7 @@
           <a:p>
             <a:fld id="{C6A72A79-3CD5-45FF-B4A2-CB727F17E6E3}" type="datetimeFigureOut">
               <a:rPr lang="ko-KR" altLang="en-US" smtClean="0"/>
-              <a:t>2025-08-01</a:t>
+              <a:t>08-01(Fri)</a:t>
             </a:fld>
             <a:endParaRPr lang="ko-KR" altLang="en-US"/>
           </a:p>
@@ -3225,7 +3225,7 @@
           <a:p>
             <a:fld id="{C6A72A79-3CD5-45FF-B4A2-CB727F17E6E3}" type="datetimeFigureOut">
               <a:rPr lang="ko-KR" altLang="en-US" smtClean="0"/>
-              <a:t>2025-08-01</a:t>
+              <a:t>08-01(Fri)</a:t>
             </a:fld>
             <a:endParaRPr lang="ko-KR" altLang="en-US" dirty="0"/>
           </a:p>
@@ -4717,7 +4717,7 @@
         <p:cNvPr id="1" name="">
           <a:extLst>
             <a:ext uri="{FF2B5EF4-FFF2-40B4-BE49-F238E27FC236}">
-              <a16:creationId xmlns:a16="http://schemas.microsoft.com/office/drawing/2014/main" id="{E11802A3-6543-0A73-AA3C-BAE20E379ECA}"/>
+              <a16:creationId xmlns:a16="http://schemas.microsoft.com/office/drawing/2014/main" id="{B99A33C7-B939-E852-7E92-64AC1B3DA295}"/>
             </a:ext>
           </a:extLst>
         </p:cNvPr>
@@ -4737,7 +4737,7 @@
           <p:cNvPr id="4" name="TextBox 3">
             <a:extLst>
               <a:ext uri="{FF2B5EF4-FFF2-40B4-BE49-F238E27FC236}">
-                <a16:creationId xmlns:a16="http://schemas.microsoft.com/office/drawing/2014/main" id="{ACA581E9-27A9-D3F5-6351-40729EF8E946}"/>
+                <a16:creationId xmlns:a16="http://schemas.microsoft.com/office/drawing/2014/main" id="{93B77123-1149-21F2-28BC-3236CDBFA25C}"/>
               </a:ext>
             </a:extLst>
           </p:cNvPr>
@@ -4760,27 +4760,68 @@
           </a:bodyPr>
           <a:lstStyle/>
           <a:p>
-            <a:r>
-              <a:rPr lang="en-US" altLang="ko-KR" sz="4000" b="1" dirty="0">
+            <a:pPr marL="0" marR="0" lvl="0" indent="0" algn="l" defTabSz="457200" rtl="0" eaLnBrk="1" fontAlgn="auto" latinLnBrk="0" hangingPunct="1">
+              <a:lnSpc>
+                <a:spcPct val="100000"/>
+              </a:lnSpc>
+              <a:spcBef>
+                <a:spcPts val="0"/>
+              </a:spcBef>
+              <a:spcAft>
+                <a:spcPts val="0"/>
+              </a:spcAft>
+              <a:buClrTx/>
+              <a:buSzTx/>
+              <a:buFontTx/>
+              <a:buNone/>
+              <a:tabLst/>
+              <a:defRPr/>
+            </a:pPr>
+            <a:r>
+              <a:rPr kumimoji="0" lang="en-US" altLang="ko-KR" sz="4000" b="1" i="0" u="none" strike="noStrike" kern="1200" cap="none" spc="0" normalizeH="0" baseline="0" noProof="0" dirty="0">
+                <a:ln>
+                  <a:noFill/>
+                </a:ln>
                 <a:solidFill>
                   <a:srgbClr val="508D4E"/>
                 </a:solidFill>
+                <a:effectLst/>
+                <a:uLnTx/>
+                <a:uFillTx/>
+                <a:latin typeface="+mn-ea"/>
+                <a:cs typeface="+mn-cs"/>
               </a:rPr>
               <a:t>Projects / </a:t>
             </a:r>
             <a:r>
-              <a:rPr lang="ko-KR" altLang="en-US" sz="4000" b="1" dirty="0" err="1">
+              <a:rPr kumimoji="0" lang="ko-KR" altLang="en-US" sz="4000" b="1" i="0" u="none" strike="noStrike" kern="1200" cap="none" spc="0" normalizeH="0" baseline="0" noProof="0" dirty="0" err="1">
+                <a:ln>
+                  <a:noFill/>
+                </a:ln>
                 <a:solidFill>
                   <a:srgbClr val="508D4E"/>
                 </a:solidFill>
+                <a:effectLst/>
+                <a:uLnTx/>
+                <a:uFillTx/>
+                <a:latin typeface="+mn-ea"/>
+                <a:cs typeface="+mn-cs"/>
               </a:rPr>
               <a:t>윈즈</a:t>
             </a:r>
             <a:r>
-              <a:rPr lang="ko-KR" altLang="en-US" sz="4000" b="1" dirty="0">
+              <a:rPr kumimoji="0" lang="ko-KR" altLang="en-US" sz="4000" b="1" i="0" u="none" strike="noStrike" kern="1200" cap="none" spc="0" normalizeH="0" baseline="0" noProof="0" dirty="0">
+                <a:ln>
+                  <a:noFill/>
+                </a:ln>
                 <a:solidFill>
                   <a:srgbClr val="508D4E"/>
                 </a:solidFill>
+                <a:effectLst/>
+                <a:uLnTx/>
+                <a:uFillTx/>
+                <a:latin typeface="+mn-ea"/>
+                <a:cs typeface="+mn-cs"/>
               </a:rPr>
               <a:t> 시스템</a:t>
             </a:r>
@@ -4792,7 +4833,7 @@
           <p:cNvPr id="5" name="TextBox 4">
             <a:extLst>
               <a:ext uri="{FF2B5EF4-FFF2-40B4-BE49-F238E27FC236}">
-                <a16:creationId xmlns:a16="http://schemas.microsoft.com/office/drawing/2014/main" id="{99F8789B-D60C-B69D-1043-94AB3429D23D}"/>
+                <a16:creationId xmlns:a16="http://schemas.microsoft.com/office/drawing/2014/main" id="{9C02A834-9E7E-AF9B-60C7-5B5BCA18EDEE}"/>
               </a:ext>
             </a:extLst>
           </p:cNvPr>
@@ -4801,8 +4842,8 @@
         </p:nvSpPr>
         <p:spPr>
           <a:xfrm>
-            <a:off x="1146968" y="1272808"/>
-            <a:ext cx="8156520" cy="461665"/>
+            <a:off x="1146967" y="1272808"/>
+            <a:ext cx="10761497" cy="461665"/>
           </a:xfrm>
           <a:prstGeom prst="rect">
             <a:avLst/>
@@ -4815,21 +4856,118 @@
           </a:bodyPr>
           <a:lstStyle/>
           <a:p>
-            <a:r>
-              <a:rPr lang="en-US" altLang="ko-KR" sz="2400" b="1" dirty="0"/>
-              <a:t>4. </a:t>
-            </a:r>
-            <a:r>
-              <a:rPr lang="ko-KR" altLang="en-US" sz="2400" b="1" dirty="0"/>
-              <a:t>안드로이드 </a:t>
-            </a:r>
-            <a:r>
-              <a:rPr lang="en-US" altLang="ko-KR" sz="2400" b="1" dirty="0"/>
-              <a:t>OS </a:t>
-            </a:r>
-            <a:r>
-              <a:rPr lang="ko-KR" altLang="en-US" sz="2400" b="1" dirty="0"/>
-              <a:t>업데이트에 따른 이슈 및 업데이트 대응</a:t>
+            <a:pPr marL="0" marR="0" lvl="0" indent="0" algn="l" defTabSz="457200" rtl="0" eaLnBrk="1" fontAlgn="auto" latinLnBrk="0" hangingPunct="1">
+              <a:lnSpc>
+                <a:spcPct val="100000"/>
+              </a:lnSpc>
+              <a:spcBef>
+                <a:spcPts val="0"/>
+              </a:spcBef>
+              <a:spcAft>
+                <a:spcPts val="0"/>
+              </a:spcAft>
+              <a:buClrTx/>
+              <a:buSzTx/>
+              <a:buFontTx/>
+              <a:buNone/>
+              <a:tabLst/>
+              <a:defRPr/>
+            </a:pPr>
+            <a:r>
+              <a:rPr kumimoji="0" lang="en-US" altLang="ko-KR" sz="2400" b="1" i="0" u="none" strike="noStrike" kern="1200" cap="none" spc="0" normalizeH="0" baseline="0" noProof="0" dirty="0">
+                <a:ln>
+                  <a:noFill/>
+                </a:ln>
+                <a:solidFill>
+                  <a:prstClr val="black"/>
+                </a:solidFill>
+                <a:effectLst/>
+                <a:uLnTx/>
+                <a:uFillTx/>
+                <a:latin typeface="+mn-ea"/>
+                <a:cs typeface="+mn-cs"/>
+              </a:rPr>
+              <a:t>3. </a:t>
+            </a:r>
+            <a:r>
+              <a:rPr kumimoji="0" lang="ko-KR" altLang="en-US" sz="2400" b="1" i="0" u="none" strike="noStrike" kern="1200" cap="none" spc="0" normalizeH="0" baseline="0" noProof="0" dirty="0">
+                <a:ln>
+                  <a:noFill/>
+                </a:ln>
+                <a:solidFill>
+                  <a:prstClr val="black"/>
+                </a:solidFill>
+                <a:effectLst/>
+                <a:uLnTx/>
+                <a:uFillTx/>
+                <a:latin typeface="+mn-ea"/>
+                <a:cs typeface="+mn-cs"/>
+              </a:rPr>
+              <a:t>모바일 원격 </a:t>
+            </a:r>
+            <a:r>
+              <a:rPr kumimoji="0" lang="ko-KR" altLang="en-US" sz="2400" b="1" i="0" u="none" strike="noStrike" kern="1200" cap="none" spc="0" normalizeH="0" baseline="0" noProof="0" dirty="0" err="1">
+                <a:ln>
+                  <a:noFill/>
+                </a:ln>
+                <a:solidFill>
+                  <a:prstClr val="black"/>
+                </a:solidFill>
+                <a:effectLst/>
+                <a:uLnTx/>
+                <a:uFillTx/>
+                <a:latin typeface="+mn-ea"/>
+                <a:cs typeface="+mn-cs"/>
+              </a:rPr>
+              <a:t>점검툴</a:t>
+            </a:r>
+            <a:r>
+              <a:rPr kumimoji="0" lang="ko-KR" altLang="en-US" sz="2400" b="1" i="0" u="none" strike="noStrike" kern="1200" cap="none" spc="0" normalizeH="0" baseline="0" noProof="0" dirty="0">
+                <a:ln>
+                  <a:noFill/>
+                </a:ln>
+                <a:solidFill>
+                  <a:prstClr val="black"/>
+                </a:solidFill>
+                <a:effectLst/>
+                <a:uLnTx/>
+                <a:uFillTx/>
+                <a:latin typeface="+mn-ea"/>
+                <a:cs typeface="+mn-cs"/>
+              </a:rPr>
+              <a:t> 그리기 기능 개발 및 삼성 </a:t>
+            </a:r>
+            <a:r>
+              <a:rPr kumimoji="0" lang="en-US" altLang="ko-KR" sz="2400" b="1" i="0" u="none" strike="noStrike" kern="1200" cap="none" spc="0" normalizeH="0" baseline="0" noProof="0" dirty="0">
+                <a:ln>
+                  <a:noFill/>
+                </a:ln>
+                <a:solidFill>
+                  <a:prstClr val="black"/>
+                </a:solidFill>
+                <a:effectLst/>
+                <a:uLnTx/>
+                <a:uFillTx/>
+                <a:latin typeface="+mn-ea"/>
+                <a:cs typeface="+mn-cs"/>
+              </a:rPr>
+              <a:t>KNOX</a:t>
+            </a:r>
+            <a:r>
+              <a:rPr kumimoji="0" lang="ko-KR" altLang="en-US" sz="2400" b="1" i="0" u="none" strike="noStrike" kern="1200" cap="none" spc="0" normalizeH="0" baseline="0" noProof="0" dirty="0">
+                <a:ln>
+                  <a:noFill/>
+                </a:ln>
+                <a:solidFill>
+                  <a:prstClr val="black"/>
+                </a:solidFill>
+                <a:effectLst/>
+                <a:uLnTx/>
+                <a:uFillTx/>
+                <a:latin typeface="+mn-ea"/>
+                <a:cs typeface="+mn-cs"/>
+              </a:rPr>
+              <a:t>를 사용한 터치 기능 고도화</a:t>
             </a:r>
           </a:p>
         </p:txBody>
@@ -4839,7 +4977,7 @@
           <p:cNvPr id="7" name="TextBox 6">
             <a:extLst>
               <a:ext uri="{FF2B5EF4-FFF2-40B4-BE49-F238E27FC236}">
-                <a16:creationId xmlns:a16="http://schemas.microsoft.com/office/drawing/2014/main" id="{85B9D3B6-9799-027C-B9DF-C1F6B196A04F}"/>
+                <a16:creationId xmlns:a16="http://schemas.microsoft.com/office/drawing/2014/main" id="{DD825C18-D4DE-7A85-0904-A8E94AED404E}"/>
               </a:ext>
             </a:extLst>
           </p:cNvPr>
@@ -4848,8 +4986,8 @@
         </p:nvSpPr>
         <p:spPr>
           <a:xfrm>
-            <a:off x="1146967" y="1734473"/>
-            <a:ext cx="12133098" cy="1200329"/>
+            <a:off x="1146968" y="1734473"/>
+            <a:ext cx="11080474" cy="1200329"/>
           </a:xfrm>
           <a:prstGeom prst="rect">
             <a:avLst/>
@@ -4877,88 +5015,299 @@
               <a:buFontTx/>
               <a:buNone/>
               <a:tabLst/>
+              <a:defRPr/>
             </a:pPr>
             <a:r>
-              <a:rPr lang="ko-KR" altLang="en-US" dirty="0"/>
-              <a:t>안드로이드 앱 </a:t>
-            </a:r>
-            <a:r>
-              <a:rPr lang="en-US" altLang="ko-KR" dirty="0"/>
-              <a:t>Google Play </a:t>
-            </a:r>
-            <a:r>
-              <a:rPr lang="ko-KR" altLang="en-US" dirty="0"/>
-              <a:t>신규 업로드 혹은 업데이트 시</a:t>
-            </a:r>
-            <a:r>
-              <a:rPr lang="en-US" altLang="ko-KR" dirty="0"/>
-              <a:t>, </a:t>
-            </a:r>
-            <a:r>
-              <a:rPr lang="ko-KR" altLang="en-US" dirty="0"/>
-              <a:t>구글에서 요청하는 앱 내부의 </a:t>
-            </a:r>
-            <a:r>
-              <a:rPr lang="en-US" altLang="ko-KR" dirty="0"/>
-              <a:t>Android </a:t>
-            </a:r>
-            <a:r>
-              <a:rPr lang="ko-KR" altLang="en-US" dirty="0"/>
-              <a:t>버전을 맞춰야 함</a:t>
-            </a:r>
-            <a:r>
-              <a:rPr lang="en-US" altLang="ko-KR" dirty="0"/>
-              <a:t>. (</a:t>
-            </a:r>
-            <a:r>
-              <a:rPr lang="ko-KR" altLang="en-US" dirty="0">
-                <a:effectLst/>
-                <a:hlinkClick r:id="rId2"/>
-              </a:rPr>
-              <a:t>링크</a:t>
-            </a:r>
-            <a:r>
-              <a:rPr lang="en-US" altLang="ko-KR" dirty="0"/>
-              <a:t>)</a:t>
-            </a:r>
-            <a:br>
-              <a:rPr lang="en-US" altLang="ko-KR" dirty="0"/>
-            </a:br>
-            <a:r>
-              <a:rPr lang="ko-KR" altLang="en-US" dirty="0"/>
-              <a:t>앱 업데이트 시 기존 라이브러리 사용 불가에 따른 코드 수정 및 신규 기능 추가에 대한 개발 필요</a:t>
-            </a:r>
-            <a:r>
-              <a:rPr lang="en-US" altLang="ko-KR" dirty="0"/>
+              <a:rPr kumimoji="0" lang="en-US" altLang="ko-KR" sz="1800" b="0" i="0" u="none" strike="noStrike" kern="1200" cap="none" spc="0" normalizeH="0" baseline="0" noProof="0" dirty="0">
+                <a:ln>
+                  <a:noFill/>
+                </a:ln>
+                <a:solidFill>
+                  <a:prstClr val="black"/>
+                </a:solidFill>
+                <a:effectLst/>
+                <a:uLnTx/>
+                <a:uFillTx/>
+                <a:latin typeface="+mn-ea"/>
+                <a:cs typeface="+mn-cs"/>
+              </a:rPr>
+              <a:t>Google</a:t>
+            </a:r>
+            <a:r>
+              <a:rPr kumimoji="0" lang="ko-KR" altLang="en-US" sz="1800" b="0" i="0" u="none" strike="noStrike" kern="1200" cap="none" spc="0" normalizeH="0" baseline="0" noProof="0" dirty="0">
+                <a:ln>
+                  <a:noFill/>
+                </a:ln>
+                <a:solidFill>
+                  <a:prstClr val="black"/>
+                </a:solidFill>
+                <a:effectLst/>
+                <a:uLnTx/>
+                <a:uFillTx/>
+                <a:latin typeface="+mn-ea"/>
+                <a:cs typeface="+mn-cs"/>
+              </a:rPr>
+              <a:t>의 안드로이드 </a:t>
+            </a:r>
+            <a:r>
+              <a:rPr kumimoji="0" lang="en-US" altLang="ko-KR" sz="1800" b="0" i="0" u="none" strike="noStrike" kern="1200" cap="none" spc="0" normalizeH="0" baseline="0" noProof="0" dirty="0">
+                <a:ln>
+                  <a:noFill/>
+                </a:ln>
+                <a:solidFill>
+                  <a:prstClr val="black"/>
+                </a:solidFill>
+                <a:effectLst/>
+                <a:uLnTx/>
+                <a:uFillTx/>
+                <a:latin typeface="+mn-ea"/>
+                <a:cs typeface="+mn-cs"/>
+              </a:rPr>
+              <a:t>OS </a:t>
+            </a:r>
+            <a:r>
+              <a:rPr kumimoji="0" lang="ko-KR" altLang="en-US" sz="1800" b="0" i="0" u="none" strike="noStrike" kern="1200" cap="none" spc="0" normalizeH="0" baseline="0" noProof="0" dirty="0">
+                <a:ln>
+                  <a:noFill/>
+                </a:ln>
+                <a:solidFill>
+                  <a:prstClr val="black"/>
+                </a:solidFill>
+                <a:effectLst/>
+                <a:uLnTx/>
+                <a:uFillTx/>
+                <a:latin typeface="+mn-ea"/>
+                <a:cs typeface="+mn-cs"/>
+              </a:rPr>
+              <a:t>업데이트 흐름이 하드웨어 제어 </a:t>
+            </a:r>
+            <a:r>
+              <a:rPr kumimoji="0" lang="en-US" altLang="ko-KR" sz="1800" b="0" i="0" u="none" strike="noStrike" kern="1200" cap="none" spc="0" normalizeH="0" baseline="0" noProof="0" dirty="0">
+                <a:ln>
+                  <a:noFill/>
+                </a:ln>
+                <a:solidFill>
+                  <a:prstClr val="black"/>
+                </a:solidFill>
+                <a:effectLst/>
+                <a:uLnTx/>
+                <a:uFillTx/>
+                <a:latin typeface="+mn-ea"/>
+                <a:cs typeface="+mn-cs"/>
+              </a:rPr>
+              <a:t>API</a:t>
+            </a:r>
+            <a:r>
+              <a:rPr kumimoji="0" lang="ko-KR" altLang="en-US" sz="1800" b="0" i="0" u="none" strike="noStrike" kern="1200" cap="none" spc="0" normalizeH="0" baseline="0" noProof="0" dirty="0">
+                <a:ln>
+                  <a:noFill/>
+                </a:ln>
+                <a:solidFill>
+                  <a:prstClr val="black"/>
+                </a:solidFill>
+                <a:effectLst/>
+                <a:uLnTx/>
+                <a:uFillTx/>
+                <a:latin typeface="+mn-ea"/>
+                <a:cs typeface="+mn-cs"/>
+              </a:rPr>
+              <a:t>가 제한되는 추세</a:t>
+            </a:r>
+            <a:r>
+              <a:rPr kumimoji="0" lang="en-US" altLang="ko-KR" sz="1800" b="0" i="0" u="none" strike="noStrike" kern="1200" cap="none" spc="0" normalizeH="0" baseline="0" noProof="0" dirty="0">
+                <a:ln>
+                  <a:noFill/>
+                </a:ln>
+                <a:solidFill>
+                  <a:prstClr val="black"/>
+                </a:solidFill>
+                <a:effectLst/>
+                <a:uLnTx/>
+                <a:uFillTx/>
+                <a:latin typeface="+mn-ea"/>
+                <a:cs typeface="+mn-cs"/>
+              </a:rPr>
               <a:t>.</a:t>
             </a:r>
-            <a:br>
-              <a:rPr lang="en-US" altLang="ko-KR" dirty="0"/>
-            </a:br>
-            <a:r>
-              <a:rPr lang="ko-KR" altLang="en-US" dirty="0"/>
-              <a:t>버전 업데이트 시 안드로이드 </a:t>
-            </a:r>
-            <a:r>
-              <a:rPr lang="en-US" altLang="ko-KR" dirty="0"/>
-              <a:t>SDK </a:t>
-            </a:r>
-            <a:r>
-              <a:rPr lang="ko-KR" altLang="en-US" dirty="0"/>
-              <a:t>버전에 따른 라이브러리 이슈 사항 대응 필요</a:t>
-            </a:r>
-            <a:r>
-              <a:rPr lang="en-US" altLang="ko-KR" dirty="0"/>
-              <a:t>. </a:t>
-            </a:r>
-            <a:br>
-              <a:rPr lang="en-US" altLang="ko-KR" dirty="0"/>
-            </a:br>
-            <a:r>
-              <a:rPr lang="ko-KR" altLang="en-US" dirty="0"/>
-              <a:t>미 업데이트 시 앱 스토어 노출 불가 이슈 발생으로 매 년 변경되는 요구 사항에 맞춰 업데이트를 진행 해야 함</a:t>
-            </a:r>
-            <a:endParaRPr lang="en-US" altLang="ko-KR" dirty="0"/>
+          </a:p>
+          <a:p>
+            <a:pPr marL="0" marR="0" lvl="0" indent="0" algn="l" defTabSz="914400" rtl="0" eaLnBrk="0" fontAlgn="base" latinLnBrk="0" hangingPunct="0">
+              <a:lnSpc>
+                <a:spcPct val="100000"/>
+              </a:lnSpc>
+              <a:spcBef>
+                <a:spcPct val="0"/>
+              </a:spcBef>
+              <a:spcAft>
+                <a:spcPct val="0"/>
+              </a:spcAft>
+              <a:buClrTx/>
+              <a:buSzTx/>
+              <a:buFontTx/>
+              <a:buNone/>
+              <a:tabLst/>
+              <a:defRPr/>
+            </a:pPr>
+            <a:r>
+              <a:rPr kumimoji="0" lang="ko-KR" altLang="en-US" sz="1800" b="0" i="0" u="none" strike="noStrike" kern="1200" cap="none" spc="0" normalizeH="0" baseline="0" noProof="0" dirty="0">
+                <a:ln>
+                  <a:noFill/>
+                </a:ln>
+                <a:solidFill>
+                  <a:prstClr val="black"/>
+                </a:solidFill>
+                <a:effectLst/>
+                <a:uLnTx/>
+                <a:uFillTx/>
+                <a:latin typeface="+mn-ea"/>
+                <a:cs typeface="+mn-cs"/>
+              </a:rPr>
+              <a:t>이에 따라 앱의 기능들이 점점 사용할 수 없게 되어가는 상황에서 서비스 유지를 위해 기능 고도화 필요</a:t>
+            </a:r>
+            <a:r>
+              <a:rPr kumimoji="0" lang="en-US" altLang="ko-KR" sz="1800" b="0" i="0" u="none" strike="noStrike" kern="1200" cap="none" spc="0" normalizeH="0" baseline="0" noProof="0" dirty="0">
+                <a:ln>
+                  <a:noFill/>
+                </a:ln>
+                <a:solidFill>
+                  <a:prstClr val="black"/>
+                </a:solidFill>
+                <a:effectLst/>
+                <a:uLnTx/>
+                <a:uFillTx/>
+                <a:latin typeface="+mn-ea"/>
+                <a:cs typeface="+mn-cs"/>
+              </a:rPr>
+              <a:t>.</a:t>
+            </a:r>
+          </a:p>
+          <a:p>
+            <a:pPr marL="0" marR="0" lvl="0" indent="0" algn="l" defTabSz="914400" rtl="0" eaLnBrk="0" fontAlgn="base" latinLnBrk="0" hangingPunct="0">
+              <a:lnSpc>
+                <a:spcPct val="100000"/>
+              </a:lnSpc>
+              <a:spcBef>
+                <a:spcPct val="0"/>
+              </a:spcBef>
+              <a:spcAft>
+                <a:spcPct val="0"/>
+              </a:spcAft>
+              <a:buClrTx/>
+              <a:buSzTx/>
+              <a:buFontTx/>
+              <a:buNone/>
+              <a:tabLst/>
+              <a:defRPr/>
+            </a:pPr>
+            <a:r>
+              <a:rPr kumimoji="0" lang="en-US" altLang="ko-KR" sz="1800" b="0" i="0" u="none" strike="noStrike" kern="1200" cap="none" spc="0" normalizeH="0" baseline="0" noProof="0" dirty="0">
+                <a:ln>
+                  <a:noFill/>
+                </a:ln>
+                <a:solidFill>
+                  <a:prstClr val="black"/>
+                </a:solidFill>
+                <a:effectLst/>
+                <a:uLnTx/>
+                <a:uFillTx/>
+                <a:latin typeface="+mn-ea"/>
+                <a:cs typeface="+mn-cs"/>
+              </a:rPr>
+              <a:t>Google</a:t>
+            </a:r>
+            <a:r>
+              <a:rPr kumimoji="0" lang="ko-KR" altLang="en-US" sz="1800" b="0" i="0" u="none" strike="noStrike" kern="1200" cap="none" spc="0" normalizeH="0" baseline="0" noProof="0" dirty="0">
+                <a:ln>
+                  <a:noFill/>
+                </a:ln>
+                <a:solidFill>
+                  <a:prstClr val="black"/>
+                </a:solidFill>
+                <a:effectLst/>
+                <a:uLnTx/>
+                <a:uFillTx/>
+                <a:latin typeface="+mn-ea"/>
+                <a:cs typeface="+mn-cs"/>
+              </a:rPr>
+              <a:t>의 안드로이드 </a:t>
+            </a:r>
+            <a:r>
+              <a:rPr kumimoji="0" lang="en-US" altLang="ko-KR" sz="1800" b="0" i="0" u="none" strike="noStrike" kern="1200" cap="none" spc="0" normalizeH="0" baseline="0" noProof="0" dirty="0">
+                <a:ln>
+                  <a:noFill/>
+                </a:ln>
+                <a:solidFill>
+                  <a:prstClr val="black"/>
+                </a:solidFill>
+                <a:effectLst/>
+                <a:uLnTx/>
+                <a:uFillTx/>
+                <a:latin typeface="+mn-ea"/>
+                <a:cs typeface="+mn-cs"/>
+              </a:rPr>
+              <a:t>SDK</a:t>
+            </a:r>
+            <a:r>
+              <a:rPr kumimoji="0" lang="ko-KR" altLang="en-US" sz="1800" b="0" i="0" u="none" strike="noStrike" kern="1200" cap="none" spc="0" normalizeH="0" baseline="0" noProof="0" dirty="0">
+                <a:ln>
+                  <a:noFill/>
+                </a:ln>
+                <a:solidFill>
+                  <a:prstClr val="black"/>
+                </a:solidFill>
+                <a:effectLst/>
+                <a:uLnTx/>
+                <a:uFillTx/>
+                <a:latin typeface="+mn-ea"/>
+                <a:cs typeface="+mn-cs"/>
+              </a:rPr>
+              <a:t>를 넘어선 외부 </a:t>
+            </a:r>
+            <a:r>
+              <a:rPr kumimoji="0" lang="en-US" altLang="ko-KR" sz="1800" b="0" i="0" u="none" strike="noStrike" kern="1200" cap="none" spc="0" normalizeH="0" baseline="0" noProof="0" dirty="0">
+                <a:ln>
+                  <a:noFill/>
+                </a:ln>
+                <a:solidFill>
+                  <a:prstClr val="black"/>
+                </a:solidFill>
+                <a:effectLst/>
+                <a:uLnTx/>
+                <a:uFillTx/>
+                <a:latin typeface="+mn-ea"/>
+                <a:cs typeface="+mn-cs"/>
+              </a:rPr>
+              <a:t>API</a:t>
+            </a:r>
+            <a:r>
+              <a:rPr kumimoji="0" lang="ko-KR" altLang="en-US" sz="1800" b="0" i="0" u="none" strike="noStrike" kern="1200" cap="none" spc="0" normalizeH="0" baseline="0" noProof="0" dirty="0">
+                <a:ln>
+                  <a:noFill/>
+                </a:ln>
+                <a:solidFill>
+                  <a:prstClr val="black"/>
+                </a:solidFill>
+                <a:effectLst/>
+                <a:uLnTx/>
+                <a:uFillTx/>
+                <a:latin typeface="+mn-ea"/>
+                <a:cs typeface="+mn-cs"/>
+              </a:rPr>
+              <a:t>를 활용하여 기존 기능의 고도화 및 서비스 유지를 목표로 하는 프로젝트 진행</a:t>
+            </a:r>
+            <a:endParaRPr kumimoji="0" lang="en-US" altLang="ko-KR" sz="1800" b="0" i="0" u="none" strike="noStrike" kern="1200" cap="none" spc="0" normalizeH="0" baseline="0" noProof="0" dirty="0">
+              <a:ln>
+                <a:noFill/>
+              </a:ln>
+              <a:solidFill>
+                <a:prstClr val="black"/>
+              </a:solidFill>
+              <a:effectLst/>
+              <a:uLnTx/>
+              <a:uFillTx/>
+              <a:latin typeface="+mn-ea"/>
+              <a:cs typeface="+mn-cs"/>
+            </a:endParaRPr>
           </a:p>
         </p:txBody>
       </p:sp>
@@ -4967,7 +5316,7 @@
           <p:cNvPr id="2" name="직사각형 1">
             <a:extLst>
               <a:ext uri="{FF2B5EF4-FFF2-40B4-BE49-F238E27FC236}">
-                <a16:creationId xmlns:a16="http://schemas.microsoft.com/office/drawing/2014/main" id="{7FA2D19F-8398-2770-2FB4-C321170BEAD3}"/>
+                <a16:creationId xmlns:a16="http://schemas.microsoft.com/office/drawing/2014/main" id="{00FA6FB4-6603-7602-A99D-2A080CBEACA1}"/>
               </a:ext>
             </a:extLst>
           </p:cNvPr>
@@ -5011,8 +5360,36 @@
           <a:bodyPr rtlCol="0" anchor="ctr"/>
           <a:lstStyle/>
           <a:p>
-            <a:pPr algn="ctr"/>
-            <a:endParaRPr lang="ko-KR" altLang="en-US"/>
+            <a:pPr marL="0" marR="0" lvl="0" indent="0" algn="ctr" defTabSz="457200" rtl="0" eaLnBrk="1" fontAlgn="auto" latinLnBrk="0" hangingPunct="1">
+              <a:lnSpc>
+                <a:spcPct val="100000"/>
+              </a:lnSpc>
+              <a:spcBef>
+                <a:spcPts val="0"/>
+              </a:spcBef>
+              <a:spcAft>
+                <a:spcPts val="0"/>
+              </a:spcAft>
+              <a:buClrTx/>
+              <a:buSzTx/>
+              <a:buFontTx/>
+              <a:buNone/>
+              <a:tabLst/>
+              <a:defRPr/>
+            </a:pPr>
+            <a:endParaRPr kumimoji="0" lang="ko-KR" altLang="en-US" sz="1800" b="0" i="0" u="none" strike="noStrike" kern="1200" cap="none" spc="0" normalizeH="0" baseline="0" noProof="0">
+              <a:ln>
+                <a:noFill/>
+              </a:ln>
+              <a:solidFill>
+                <a:prstClr val="white"/>
+              </a:solidFill>
+              <a:effectLst/>
+              <a:uLnTx/>
+              <a:uFillTx/>
+              <a:ea typeface="SUIT Variable"/>
+              <a:cs typeface="+mn-cs"/>
+            </a:endParaRPr>
           </a:p>
         </p:txBody>
       </p:sp>
@@ -5021,7 +5398,7 @@
           <p:cNvPr id="3" name="TextBox 2">
             <a:extLst>
               <a:ext uri="{FF2B5EF4-FFF2-40B4-BE49-F238E27FC236}">
-                <a16:creationId xmlns:a16="http://schemas.microsoft.com/office/drawing/2014/main" id="{E40B68F2-4A61-3729-364A-B7388C4C7717}"/>
+                <a16:creationId xmlns:a16="http://schemas.microsoft.com/office/drawing/2014/main" id="{F1CD453D-CA35-8208-8295-18A52B65134D}"/>
               </a:ext>
             </a:extLst>
           </p:cNvPr>
@@ -5044,6 +5421,23 @@
           </a:bodyPr>
           <a:lstStyle/>
           <a:p>
+            <a:pPr marL="0" marR="0" lvl="0" indent="0" algn="l" defTabSz="457200" rtl="0" eaLnBrk="1" fontAlgn="auto" latinLnBrk="0" hangingPunct="1">
+              <a:lnSpc>
+                <a:spcPct val="100000"/>
+              </a:lnSpc>
+              <a:spcBef>
+                <a:spcPts val="0"/>
+              </a:spcBef>
+              <a:spcAft>
+                <a:spcPts val="0"/>
+              </a:spcAft>
+              <a:buClrTx/>
+              <a:buSzTx/>
+              <a:buFontTx/>
+              <a:buNone/>
+              <a:tabLst/>
+              <a:defRPr/>
+            </a:pPr>
             <a:r>
               <a:rPr lang="ko-KR" altLang="en-US" sz="1800" b="1" dirty="0">
                 <a:effectLst/>
@@ -5051,18 +5445,50 @@
               <a:t>🛠️</a:t>
             </a:r>
             <a:r>
-              <a:rPr lang="ko-KR" altLang="en-US" b="1" dirty="0">
-                <a:effectLst/>
+              <a:rPr kumimoji="0" lang="ko-KR" altLang="en-US" sz="1800" b="1" i="0" u="none" strike="noStrike" kern="1200" cap="none" spc="0" normalizeH="0" baseline="0" noProof="0" dirty="0">
+                <a:ln>
+                  <a:noFill/>
+                </a:ln>
+                <a:solidFill>
+                  <a:prstClr val="black"/>
+                </a:solidFill>
+                <a:effectLst/>
+                <a:uLnTx/>
+                <a:uFillTx/>
+                <a:ea typeface="SUIT Variable"/>
+                <a:cs typeface="+mn-cs"/>
               </a:rPr>
               <a:t> </a:t>
             </a:r>
             <a:r>
-              <a:rPr lang="en-US" altLang="ko-KR" b="1" dirty="0">
-                <a:effectLst/>
+              <a:rPr kumimoji="0" lang="en-US" altLang="ko-KR" sz="1800" b="1" i="0" u="none" strike="noStrike" kern="1200" cap="none" spc="0" normalizeH="0" baseline="0" noProof="0" dirty="0">
+                <a:ln>
+                  <a:noFill/>
+                </a:ln>
+                <a:solidFill>
+                  <a:prstClr val="black"/>
+                </a:solidFill>
+                <a:effectLst/>
+                <a:uLnTx/>
+                <a:uFillTx/>
+                <a:latin typeface="+mn-ea"/>
+                <a:cs typeface="+mn-cs"/>
               </a:rPr>
               <a:t>Android Studio, Java, Android</a:t>
             </a:r>
-            <a:endParaRPr lang="ko-KR" altLang="en-US" b="1" dirty="0"/>
+            <a:endParaRPr kumimoji="0" lang="ko-KR" altLang="en-US" sz="1800" b="1" i="0" u="none" strike="noStrike" kern="1200" cap="none" spc="0" normalizeH="0" baseline="0" noProof="0" dirty="0">
+              <a:ln>
+                <a:noFill/>
+              </a:ln>
+              <a:solidFill>
+                <a:prstClr val="black"/>
+              </a:solidFill>
+              <a:effectLst/>
+              <a:uLnTx/>
+              <a:uFillTx/>
+              <a:latin typeface="+mn-ea"/>
+              <a:cs typeface="+mn-cs"/>
+            </a:endParaRPr>
           </a:p>
         </p:txBody>
       </p:sp>
@@ -5071,7 +5497,7 @@
           <p:cNvPr id="9" name="TextBox 8">
             <a:extLst>
               <a:ext uri="{FF2B5EF4-FFF2-40B4-BE49-F238E27FC236}">
-                <a16:creationId xmlns:a16="http://schemas.microsoft.com/office/drawing/2014/main" id="{2D54C001-9DE5-B853-6B53-4A9F9AD5D2C3}"/>
+                <a16:creationId xmlns:a16="http://schemas.microsoft.com/office/drawing/2014/main" id="{473A745E-A442-1B75-0AE2-C7BD4734F127}"/>
               </a:ext>
             </a:extLst>
           </p:cNvPr>
@@ -5080,8 +5506,8 @@
         </p:nvSpPr>
         <p:spPr>
           <a:xfrm>
-            <a:off x="1146968" y="3469193"/>
-            <a:ext cx="11235532" cy="2985433"/>
+            <a:off x="1146967" y="3469193"/>
+            <a:ext cx="11335655" cy="2985433"/>
           </a:xfrm>
           <a:prstGeom prst="rect">
             <a:avLst/>
@@ -5109,12 +5535,37 @@
               <a:buFontTx/>
               <a:buNone/>
               <a:tabLst/>
+              <a:defRPr/>
             </a:pPr>
             <a:r>
-              <a:rPr lang="ko-KR" altLang="en-US" sz="2200" b="1" dirty="0"/>
+              <a:rPr kumimoji="0" lang="ko-KR" altLang="en-US" sz="2200" b="1" i="0" u="none" strike="noStrike" kern="1200" cap="none" spc="0" normalizeH="0" baseline="0" noProof="0" dirty="0">
+                <a:ln>
+                  <a:noFill/>
+                </a:ln>
+                <a:solidFill>
+                  <a:prstClr val="black"/>
+                </a:solidFill>
+                <a:effectLst/>
+                <a:uLnTx/>
+                <a:uFillTx/>
+                <a:latin typeface="+mn-ea"/>
+                <a:cs typeface="+mn-cs"/>
+              </a:rPr>
               <a:t>성과</a:t>
             </a:r>
-            <a:endParaRPr lang="en-US" altLang="ko-KR" sz="2200" b="1" dirty="0"/>
+            <a:endParaRPr kumimoji="0" lang="en-US" altLang="ko-KR" sz="2200" b="1" i="0" u="none" strike="noStrike" kern="1200" cap="none" spc="0" normalizeH="0" baseline="0" noProof="0" dirty="0">
+              <a:ln>
+                <a:noFill/>
+              </a:ln>
+              <a:solidFill>
+                <a:prstClr val="black"/>
+              </a:solidFill>
+              <a:effectLst/>
+              <a:uLnTx/>
+              <a:uFillTx/>
+              <a:latin typeface="+mn-ea"/>
+              <a:cs typeface="+mn-cs"/>
+            </a:endParaRPr>
           </a:p>
           <a:p>
             <a:pPr marL="285750" indent="-285750">
@@ -5123,31 +5574,7 @@
             </a:pPr>
             <a:r>
               <a:rPr lang="ko-KR" altLang="en-US" dirty="0"/>
-              <a:t>지속적인 </a:t>
-            </a:r>
-            <a:r>
-              <a:rPr lang="en-US" altLang="ko-KR" dirty="0"/>
-              <a:t>OS </a:t>
-            </a:r>
-            <a:r>
-              <a:rPr lang="ko-KR" altLang="en-US" dirty="0"/>
-              <a:t>업데이트 대응을 통해 </a:t>
-            </a:r>
-            <a:r>
-              <a:rPr lang="en-US" altLang="ko-KR" dirty="0"/>
-              <a:t>Google Play</a:t>
-            </a:r>
-            <a:r>
-              <a:rPr lang="ko-KR" altLang="en-US" dirty="0"/>
-              <a:t>에서 앱 서비스 진행</a:t>
-            </a:r>
-            <a:r>
-              <a:rPr lang="en-US" altLang="ko-KR" dirty="0"/>
-              <a:t>. </a:t>
-            </a:r>
-            <a:r>
-              <a:rPr lang="ko-KR" altLang="en-US" dirty="0"/>
-              <a:t>이를 통해 사용자 이탈 방지</a:t>
+              <a:t>미리 입력 해 놓은 터치 이벤트만 실행하는 기존의 제한적인 기능에서 상담사의 터치 이벤트를 완벽 구현하도록 개발</a:t>
             </a:r>
             <a:endParaRPr lang="en-US" altLang="ko-KR" dirty="0"/>
           </a:p>
@@ -5157,8 +5584,12 @@
               <a:buChar char="•"/>
             </a:pPr>
             <a:r>
-              <a:rPr lang="ko-KR" altLang="en-US" dirty="0"/>
-              <a:t>구글의 모바일 정책 변경에 능동적으로 대응</a:t>
+              <a:rPr lang="en-US" altLang="ko-KR" dirty="0"/>
+              <a:t>Android SDK</a:t>
+            </a:r>
+            <a:r>
+              <a:rPr lang="ko-KR" altLang="en-US" dirty="0"/>
+              <a:t>만으로는 불가능한 기능을 외부 플랫폼 활용으로 극복</a:t>
             </a:r>
             <a:r>
               <a:rPr lang="en-US" altLang="ko-KR" dirty="0"/>
@@ -5166,11 +5597,27 @@
             </a:r>
             <a:r>
               <a:rPr lang="ko-KR" altLang="en-US" dirty="0"/>
-              <a:t>이를 통해 서비스 운영 경험 및 앱 배포 역량 강화</a:t>
-            </a:r>
-          </a:p>
-          <a:p>
-            <a:pPr marR="0" lvl="0" algn="l" defTabSz="914400" rtl="0" eaLnBrk="0" fontAlgn="base" latinLnBrk="0" hangingPunct="0">
+              <a:t>삼성 단말 대상 기능을 고도화 하여 국내 점유율이 높은 갤럭시 기반 앱 기능성을 강화</a:t>
+            </a:r>
+            <a:r>
+              <a:rPr lang="en-US" altLang="ko-KR" dirty="0"/>
+              <a:t>. </a:t>
+            </a:r>
+            <a:r>
+              <a:rPr lang="ko-KR" altLang="en-US" dirty="0"/>
+              <a:t>또한 해당 </a:t>
+            </a:r>
+            <a:r>
+              <a:rPr lang="en-US" altLang="ko-KR" dirty="0"/>
+              <a:t>API</a:t>
+            </a:r>
+            <a:r>
+              <a:rPr lang="ko-KR" altLang="en-US" dirty="0"/>
+              <a:t> 향후 활용을 위한 기반 확보</a:t>
+            </a:r>
+          </a:p>
+          <a:p>
+            <a:pPr marL="0" marR="0" lvl="0" indent="0" algn="l" defTabSz="914400" rtl="0" eaLnBrk="0" fontAlgn="base" latinLnBrk="0" hangingPunct="0">
               <a:lnSpc>
                 <a:spcPct val="100000"/>
               </a:lnSpc>
@@ -5182,12 +5629,27 @@
               </a:spcAft>
               <a:buClrTx/>
               <a:buSzTx/>
+              <a:buFontTx/>
+              <a:buNone/>
               <a:tabLst/>
+              <a:defRPr/>
             </a:pPr>
-            <a:endParaRPr lang="en-US" altLang="ko-KR" dirty="0"/>
-          </a:p>
-          <a:p>
-            <a:pPr marR="0" lvl="0" algn="l" defTabSz="914400" rtl="0" eaLnBrk="0" fontAlgn="base" latinLnBrk="0" hangingPunct="0">
+            <a:endParaRPr kumimoji="0" lang="en-US" altLang="ko-KR" sz="1800" b="0" i="0" u="none" strike="noStrike" kern="1200" cap="none" spc="0" normalizeH="0" baseline="0" noProof="0" dirty="0">
+              <a:ln>
+                <a:noFill/>
+              </a:ln>
+              <a:solidFill>
+                <a:prstClr val="black"/>
+              </a:solidFill>
+              <a:effectLst/>
+              <a:uLnTx/>
+              <a:uFillTx/>
+              <a:ea typeface="SUIT Variable"/>
+              <a:cs typeface="+mn-cs"/>
+            </a:endParaRPr>
+          </a:p>
+          <a:p>
+            <a:pPr marL="0" marR="0" lvl="0" indent="0" algn="l" defTabSz="914400" rtl="0" eaLnBrk="0" fontAlgn="base" latinLnBrk="0" hangingPunct="0">
               <a:lnSpc>
                 <a:spcPct val="100000"/>
               </a:lnSpc>
@@ -5199,30 +5661,40 @@
               </a:spcAft>
               <a:buClrTx/>
               <a:buSzTx/>
+              <a:buFontTx/>
+              <a:buNone/>
               <a:tabLst/>
+              <a:defRPr/>
             </a:pPr>
-            <a:endParaRPr lang="en-US" altLang="ko-KR" dirty="0"/>
-          </a:p>
-          <a:p>
-            <a:pPr marR="0" lvl="0" algn="l" defTabSz="914400" rtl="0" eaLnBrk="0" fontAlgn="base" latinLnBrk="0" hangingPunct="0">
-              <a:lnSpc>
-                <a:spcPct val="100000"/>
-              </a:lnSpc>
-              <a:spcBef>
-                <a:spcPct val="0"/>
-              </a:spcBef>
-              <a:spcAft>
-                <a:spcPct val="0"/>
-              </a:spcAft>
-              <a:buClrTx/>
-              <a:buSzTx/>
-              <a:tabLst/>
-            </a:pPr>
-            <a:r>
-              <a:rPr lang="ko-KR" altLang="en-US" sz="2200" b="1" dirty="0"/>
+            <a:r>
+              <a:rPr kumimoji="0" lang="ko-KR" altLang="en-US" sz="2200" b="1" i="0" u="none" strike="noStrike" kern="1200" cap="none" spc="0" normalizeH="0" baseline="0" noProof="0" dirty="0">
+                <a:ln>
+                  <a:noFill/>
+                </a:ln>
+                <a:solidFill>
+                  <a:prstClr val="black"/>
+                </a:solidFill>
+                <a:effectLst/>
+                <a:uLnTx/>
+                <a:uFillTx/>
+                <a:latin typeface="+mn-ea"/>
+                <a:cs typeface="+mn-cs"/>
+              </a:rPr>
               <a:t>인사이트</a:t>
             </a:r>
-            <a:endParaRPr lang="en-US" altLang="ko-KR" sz="2200" b="1" dirty="0"/>
+            <a:endParaRPr kumimoji="0" lang="en-US" altLang="ko-KR" sz="2200" b="1" i="0" u="none" strike="noStrike" kern="1200" cap="none" spc="0" normalizeH="0" baseline="0" noProof="0" dirty="0">
+              <a:ln>
+                <a:noFill/>
+              </a:ln>
+              <a:solidFill>
+                <a:prstClr val="black"/>
+              </a:solidFill>
+              <a:effectLst/>
+              <a:uLnTx/>
+              <a:uFillTx/>
+              <a:latin typeface="+mn-ea"/>
+              <a:cs typeface="+mn-cs"/>
+            </a:endParaRPr>
           </a:p>
           <a:p>
             <a:pPr marL="285750" indent="-285750">
@@ -5231,7 +5703,15 @@
             </a:pPr>
             <a:r>
               <a:rPr lang="ko-KR" altLang="en-US" dirty="0"/>
-              <a:t>공식 문서를 통해 정보를 취득하는 방법과 역량을 기르고</a:t>
+              <a:t>대기업에서 만든 라이브러리 사용 및 공식 문서를 통해 어떻게 개발을 진행해야 하는지에 대한 경험</a:t>
+            </a:r>
+            <a:r>
+              <a:rPr lang="en-US" altLang="ko-KR" dirty="0"/>
+              <a:t>. </a:t>
+            </a:r>
+            <a:r>
+              <a:rPr lang="ko-KR" altLang="en-US" dirty="0"/>
+              <a:t>막연한 두려움 보다</a:t>
             </a:r>
             <a:r>
               <a:rPr lang="en-US" altLang="ko-KR" dirty="0"/>
@@ -5239,7 +5719,7 @@
             </a:r>
             <a:r>
               <a:rPr lang="ko-KR" altLang="en-US" dirty="0"/>
-              <a:t>이를 통해 문제에 대한 대응 및 해결 능력 함양</a:t>
+              <a:t>자료조사 → 분석 → 구현을 통한 체계적인 개발 진행</a:t>
             </a:r>
             <a:endParaRPr lang="en-US" altLang="ko-KR" dirty="0"/>
           </a:p>
@@ -5250,15 +5730,15 @@
             </a:pPr>
             <a:r>
               <a:rPr lang="ko-KR" altLang="en-US" dirty="0"/>
-              <a:t>자사 서비스 앱의 기능들에 대해 어떠한 </a:t>
-            </a:r>
-            <a:r>
-              <a:rPr lang="en-US" altLang="ko-KR" dirty="0"/>
-              <a:t>SDK API</a:t>
-            </a:r>
-            <a:r>
-              <a:rPr lang="ko-KR" altLang="en-US" dirty="0"/>
-              <a:t>를 사용하고</a:t>
+              <a:t>다른 사람이 할 수 있으면 나도 할 수 있다는 자신감을 함양</a:t>
+            </a:r>
+            <a:r>
+              <a:rPr lang="en-US" altLang="ko-KR" dirty="0"/>
+              <a:t>. </a:t>
+            </a:r>
+            <a:r>
+              <a:rPr lang="ko-KR" altLang="en-US" dirty="0"/>
+              <a:t>기술적 제약 환경에서도 문제 해결을 위한 다양한 접근 방식을 습득하고</a:t>
             </a:r>
             <a:r>
               <a:rPr lang="en-US" altLang="ko-KR" dirty="0"/>
@@ -5266,16 +5746,8 @@
             </a:r>
             <a:r>
               <a:rPr lang="ko-KR" altLang="en-US" dirty="0"/>
-              <a:t>어떠한 로직으로 동작하는지 전반적인 프로세스 파악의 경험 및 추후 발생하는 이슈들에 대해 명확하고 빠른 처리가 가능한 역량 증대</a:t>
-            </a:r>
-            <a:endParaRPr lang="en-US" altLang="ko-KR" dirty="0"/>
-          </a:p>
-          <a:p>
-            <a:pPr marL="285750" indent="-285750">
-              <a:buFont typeface="Arial" panose="020B0604020202020204" pitchFamily="34" charset="0"/>
-              <a:buChar char="•"/>
-            </a:pPr>
-            <a:endParaRPr lang="ko-KR" altLang="en-US" dirty="0"/>
+              <a:t>안된다는 불안감 보단 구현 가능을 생각하며 조사하는 자세를 통해 개발 역량 증대</a:t>
+            </a:r>
           </a:p>
         </p:txBody>
       </p:sp>
@@ -5284,7 +5756,7 @@
           <p:cNvPr id="6" name="직사각형 5">
             <a:extLst>
               <a:ext uri="{FF2B5EF4-FFF2-40B4-BE49-F238E27FC236}">
-                <a16:creationId xmlns:a16="http://schemas.microsoft.com/office/drawing/2014/main" id="{204FD3C1-80D9-733A-AE46-3E47ADCEBACD}"/>
+                <a16:creationId xmlns:a16="http://schemas.microsoft.com/office/drawing/2014/main" id="{45281449-081E-0BAD-7E4E-3C52BDAB9BEF}"/>
               </a:ext>
             </a:extLst>
           </p:cNvPr>
@@ -5336,7 +5808,7 @@
           <p:cNvPr id="8" name="직사각형 7">
             <a:extLst>
               <a:ext uri="{FF2B5EF4-FFF2-40B4-BE49-F238E27FC236}">
-                <a16:creationId xmlns:a16="http://schemas.microsoft.com/office/drawing/2014/main" id="{B302C9B0-EAE9-1752-32A3-3E4D727B5D05}"/>
+                <a16:creationId xmlns:a16="http://schemas.microsoft.com/office/drawing/2014/main" id="{54E0BDBA-3415-FD76-F0BD-4BE95D4C1562}"/>
               </a:ext>
             </a:extLst>
           </p:cNvPr>
@@ -5388,7 +5860,7 @@
           <p:cNvPr id="10" name="직사각형 9">
             <a:extLst>
               <a:ext uri="{FF2B5EF4-FFF2-40B4-BE49-F238E27FC236}">
-                <a16:creationId xmlns:a16="http://schemas.microsoft.com/office/drawing/2014/main" id="{31CFA638-B6C3-E12D-53FA-D7193BAE7D1C}"/>
+                <a16:creationId xmlns:a16="http://schemas.microsoft.com/office/drawing/2014/main" id="{CC5A836E-214F-958C-B8DB-1811E632B5EC}"/>
               </a:ext>
             </a:extLst>
           </p:cNvPr>
@@ -5440,7 +5912,7 @@
           <p:cNvPr id="11" name="TextBox 10">
             <a:extLst>
               <a:ext uri="{FF2B5EF4-FFF2-40B4-BE49-F238E27FC236}">
-                <a16:creationId xmlns:a16="http://schemas.microsoft.com/office/drawing/2014/main" id="{0F721B66-FBB0-82F1-600D-67FECB477FCF}"/>
+                <a16:creationId xmlns:a16="http://schemas.microsoft.com/office/drawing/2014/main" id="{CCF4EFA6-7296-ADE7-007B-CE0D15FAEC1E}"/>
               </a:ext>
             </a:extLst>
           </p:cNvPr>
@@ -5450,7 +5922,7 @@
         <p:spPr>
           <a:xfrm>
             <a:off x="1147523" y="6804351"/>
-            <a:ext cx="1691370" cy="430887"/>
+            <a:ext cx="1393658" cy="430887"/>
           </a:xfrm>
           <a:prstGeom prst="rect">
             <a:avLst/>
@@ -5491,10 +5963,9 @@
                 <a:effectLst/>
                 <a:uLnTx/>
                 <a:uFillTx/>
-                <a:latin typeface="+mj-ea"/>
-                <a:ea typeface="+mj-ea"/>
+                <a:latin typeface="+mn-ea"/>
                 <a:cs typeface="+mn-cs"/>
-                <a:hlinkClick r:id="rId3">
+                <a:hlinkClick r:id="rId2">
                   <a:extLst>
                     <a:ext uri="{A12FA001-AC4F-418D-AE19-62706E023703}">
                       <ahyp:hlinkClr xmlns:ahyp="http://schemas.microsoft.com/office/drawing/2018/hyperlinkcolor" val="tx"/>
@@ -5514,8 +5985,7 @@
               <a:effectLst/>
               <a:uLnTx/>
               <a:uFillTx/>
-              <a:latin typeface="+mj-ea"/>
-              <a:ea typeface="+mj-ea"/>
+              <a:latin typeface="+mn-ea"/>
               <a:cs typeface="+mn-cs"/>
             </a:endParaRPr>
           </a:p>
@@ -5524,7 +5994,7 @@
     </p:spTree>
     <p:extLst>
       <p:ext uri="{BB962C8B-B14F-4D97-AF65-F5344CB8AC3E}">
-        <p14:creationId xmlns:p14="http://schemas.microsoft.com/office/powerpoint/2010/main" val="3779721743"/>
+        <p14:creationId xmlns:p14="http://schemas.microsoft.com/office/powerpoint/2010/main" val="3834249452"/>
       </p:ext>
     </p:extLst>
   </p:cSld>
@@ -5542,7 +6012,7 @@
         <p:cNvPr id="1" name="">
           <a:extLst>
             <a:ext uri="{FF2B5EF4-FFF2-40B4-BE49-F238E27FC236}">
-              <a16:creationId xmlns:a16="http://schemas.microsoft.com/office/drawing/2014/main" id="{A8BBC331-B298-F93C-8CDC-03F71DB0BA6B}"/>
+              <a16:creationId xmlns:a16="http://schemas.microsoft.com/office/drawing/2014/main" id="{E11802A3-6543-0A73-AA3C-BAE20E379ECA}"/>
             </a:ext>
           </a:extLst>
         </p:cNvPr>
@@ -5562,7 +6032,7 @@
           <p:cNvPr id="4" name="TextBox 3">
             <a:extLst>
               <a:ext uri="{FF2B5EF4-FFF2-40B4-BE49-F238E27FC236}">
-                <a16:creationId xmlns:a16="http://schemas.microsoft.com/office/drawing/2014/main" id="{E009C13C-9534-D543-3ECF-66E106952DED}"/>
+                <a16:creationId xmlns:a16="http://schemas.microsoft.com/office/drawing/2014/main" id="{ACA581E9-27A9-D3F5-6351-40729EF8E946}"/>
               </a:ext>
             </a:extLst>
           </p:cNvPr>
@@ -5586,42 +6056,29 @@
           <a:lstStyle/>
           <a:p>
             <a:r>
+              <a:rPr lang="en-US" altLang="ko-KR" sz="4000" b="1" dirty="0">
+                <a:solidFill>
+                  <a:srgbClr val="508D4E"/>
+                </a:solidFill>
+              </a:rPr>
+              <a:t>Projects / </a:t>
+            </a:r>
+            <a:r>
+              <a:rPr lang="ko-KR" altLang="en-US" sz="4000" b="1" dirty="0" err="1">
+                <a:solidFill>
+                  <a:srgbClr val="508D4E"/>
+                </a:solidFill>
+              </a:rPr>
+              <a:t>윈즈</a:t>
+            </a:r>
+            <a:r>
               <a:rPr lang="ko-KR" altLang="en-US" sz="4000" b="1" dirty="0">
                 <a:solidFill>
                   <a:srgbClr val="508D4E"/>
                 </a:solidFill>
               </a:rPr>
-              <a:t>기타 </a:t>
-            </a:r>
-            <a:r>
-              <a:rPr lang="en-US" altLang="ko-KR" sz="4000" b="1" dirty="0">
-                <a:solidFill>
-                  <a:srgbClr val="508D4E"/>
-                </a:solidFill>
-              </a:rPr>
-              <a:t>/ </a:t>
-            </a:r>
-            <a:r>
-              <a:rPr lang="ko-KR" altLang="en-US" sz="4000" b="1" dirty="0">
-                <a:solidFill>
-                  <a:srgbClr val="508D4E"/>
-                </a:solidFill>
-              </a:rPr>
-              <a:t>외주 </a:t>
-            </a:r>
-            <a:r>
-              <a:rPr lang="en-US" altLang="ko-KR" sz="4000" b="1" dirty="0">
-                <a:solidFill>
-                  <a:srgbClr val="508D4E"/>
-                </a:solidFill>
-              </a:rPr>
-              <a:t>- ALYES</a:t>
-            </a:r>
-            <a:endParaRPr lang="ko-KR" altLang="en-US" sz="4000" b="1" dirty="0">
-              <a:solidFill>
-                <a:srgbClr val="508D4E"/>
-              </a:solidFill>
-            </a:endParaRPr>
+              <a:t> 시스템</a:t>
+            </a:r>
           </a:p>
         </p:txBody>
       </p:sp>
@@ -5630,7 +6087,7 @@
           <p:cNvPr id="5" name="TextBox 4">
             <a:extLst>
               <a:ext uri="{FF2B5EF4-FFF2-40B4-BE49-F238E27FC236}">
-                <a16:creationId xmlns:a16="http://schemas.microsoft.com/office/drawing/2014/main" id="{8B1B8473-9543-5D36-F00E-616F4178A878}"/>
+                <a16:creationId xmlns:a16="http://schemas.microsoft.com/office/drawing/2014/main" id="{99F8789B-D60C-B69D-1043-94AB3429D23D}"/>
               </a:ext>
             </a:extLst>
           </p:cNvPr>
@@ -5640,7 +6097,7 @@
         <p:spPr>
           <a:xfrm>
             <a:off x="1146968" y="1272808"/>
-            <a:ext cx="10029032" cy="461665"/>
+            <a:ext cx="8156520" cy="461665"/>
           </a:xfrm>
           <a:prstGeom prst="rect">
             <a:avLst/>
@@ -5655,11 +6112,19 @@
           <a:p>
             <a:r>
               <a:rPr lang="en-US" altLang="ko-KR" sz="2400" b="1" dirty="0"/>
-              <a:t>OnePass </a:t>
+              <a:t>4. </a:t>
             </a:r>
             <a:r>
               <a:rPr lang="ko-KR" altLang="en-US" sz="2400" b="1" dirty="0"/>
-              <a:t>프로젝트 개발</a:t>
+              <a:t>안드로이드 </a:t>
+            </a:r>
+            <a:r>
+              <a:rPr lang="en-US" altLang="ko-KR" sz="2400" b="1" dirty="0"/>
+              <a:t>OS </a:t>
+            </a:r>
+            <a:r>
+              <a:rPr lang="ko-KR" altLang="en-US" sz="2400" b="1" dirty="0"/>
+              <a:t>업데이트에 따른 이슈 및 업데이트 대응</a:t>
             </a:r>
           </a:p>
         </p:txBody>
@@ -5669,7 +6134,7 @@
           <p:cNvPr id="7" name="TextBox 6">
             <a:extLst>
               <a:ext uri="{FF2B5EF4-FFF2-40B4-BE49-F238E27FC236}">
-                <a16:creationId xmlns:a16="http://schemas.microsoft.com/office/drawing/2014/main" id="{97FE9CB7-DBB3-4991-8120-C2521A30A32F}"/>
+                <a16:creationId xmlns:a16="http://schemas.microsoft.com/office/drawing/2014/main" id="{85B9D3B6-9799-027C-B9DF-C1F6B196A04F}"/>
               </a:ext>
             </a:extLst>
           </p:cNvPr>
@@ -5678,8 +6143,8 @@
         </p:nvSpPr>
         <p:spPr>
           <a:xfrm>
-            <a:off x="1146968" y="1734473"/>
-            <a:ext cx="11235532" cy="1200329"/>
+            <a:off x="1146967" y="1734473"/>
+            <a:ext cx="12133098" cy="1200329"/>
           </a:xfrm>
           <a:prstGeom prst="rect">
             <a:avLst/>
@@ -5710,7 +6175,15 @@
             </a:pPr>
             <a:r>
               <a:rPr lang="ko-KR" altLang="en-US" dirty="0"/>
-              <a:t>유소년 스포츠 클럽 출결 및 셔틀</a:t>
+              <a:t>안드로이드 앱 </a:t>
+            </a:r>
+            <a:r>
+              <a:rPr lang="en-US" altLang="ko-KR" dirty="0"/>
+              <a:t>Google Play </a:t>
+            </a:r>
+            <a:r>
+              <a:rPr lang="ko-KR" altLang="en-US" dirty="0"/>
+              <a:t>신규 업로드 혹은 업데이트 시</a:t>
             </a:r>
             <a:r>
               <a:rPr lang="en-US" altLang="ko-KR" dirty="0"/>
@@ -5718,44 +6191,69 @@
             </a:r>
             <a:r>
               <a:rPr lang="ko-KR" altLang="en-US" dirty="0"/>
-              <a:t>회비 납부 여부 관리를 위한 프로젝트 외주 진행</a:t>
+              <a:t>구글에서 요청하는 앱 내부의 </a:t>
+            </a:r>
+            <a:r>
+              <a:rPr lang="en-US" altLang="ko-KR" dirty="0"/>
+              <a:t>Android </a:t>
+            </a:r>
+            <a:r>
+              <a:rPr lang="ko-KR" altLang="en-US" dirty="0"/>
+              <a:t>버전을 맞춰야 함</a:t>
+            </a:r>
+            <a:r>
+              <a:rPr lang="en-US" altLang="ko-KR" dirty="0"/>
+              <a:t>. (</a:t>
+            </a:r>
+            <a:r>
+              <a:rPr lang="ko-KR" altLang="en-US" dirty="0">
+                <a:effectLst/>
+                <a:hlinkClick r:id="rId2"/>
+              </a:rPr>
+              <a:t>링크</a:t>
+            </a:r>
+            <a:r>
+              <a:rPr lang="en-US" altLang="ko-KR" dirty="0"/>
+              <a:t>)</a:t>
+            </a:r>
+            <a:br>
+              <a:rPr lang="en-US" altLang="ko-KR" dirty="0"/>
+            </a:br>
+            <a:r>
+              <a:rPr lang="ko-KR" altLang="en-US" dirty="0"/>
+              <a:t>앱 업데이트 시 기존 라이브러리 사용 불가에 따른 코드 수정 및 신규 기능 추가에 대한 개발 필요</a:t>
+            </a:r>
+            <a:r>
+              <a:rPr lang="en-US" altLang="ko-KR" dirty="0"/>
+              <a:t>.</a:t>
+            </a:r>
+            <a:br>
+              <a:rPr lang="en-US" altLang="ko-KR" dirty="0"/>
+            </a:br>
+            <a:r>
+              <a:rPr lang="ko-KR" altLang="en-US" dirty="0"/>
+              <a:t>버전 업데이트 시 안드로이드 </a:t>
+            </a:r>
+            <a:r>
+              <a:rPr lang="en-US" altLang="ko-KR" dirty="0"/>
+              <a:t>SDK </a:t>
+            </a:r>
+            <a:r>
+              <a:rPr lang="ko-KR" altLang="en-US" dirty="0"/>
+              <a:t>버전에 따른 라이브러리 이슈 사항 대응 필요</a:t>
             </a:r>
             <a:r>
               <a:rPr lang="en-US" altLang="ko-KR" dirty="0"/>
               <a:t>. </a:t>
             </a:r>
-            <a:r>
-              <a:rPr lang="ko-KR" altLang="en-US" dirty="0"/>
-              <a:t>세월이 흘러도 몇몇 학원 및 스포츠 클럽 들은 학생들의 출결과 셔틀 탑승 여부</a:t>
-            </a:r>
-            <a:r>
-              <a:rPr lang="en-US" altLang="ko-KR" dirty="0"/>
-              <a:t>, </a:t>
-            </a:r>
-            <a:r>
-              <a:rPr lang="ko-KR" altLang="en-US" dirty="0"/>
-              <a:t>회비 관리 등을 일일이 직접 관리 하는 불편함이 있음을 확인</a:t>
-            </a:r>
-            <a:r>
-              <a:rPr lang="en-US" altLang="ko-KR" dirty="0"/>
-              <a:t>. </a:t>
-            </a:r>
-            <a:r>
-              <a:rPr lang="ko-KR" altLang="en-US" dirty="0"/>
-              <a:t>이에 외주 요청 담당자가 아이디어를 얻어 해당 업무 프로그램들을 하나로 쉽게 관리하고</a:t>
-            </a:r>
-            <a:r>
-              <a:rPr lang="en-US" altLang="ko-KR" dirty="0"/>
-              <a:t>, </a:t>
-            </a:r>
-            <a:r>
-              <a:rPr lang="ko-KR" altLang="en-US" dirty="0"/>
-              <a:t>프로그램의 구독료를 통한 수익 창출 모델을 만드는 프로젝트 외주 개발을 요청</a:t>
-            </a:r>
-            <a:r>
-              <a:rPr lang="en-US" altLang="ko-KR" dirty="0"/>
-              <a:t>.</a:t>
-            </a:r>
+            <a:br>
+              <a:rPr lang="en-US" altLang="ko-KR" dirty="0"/>
+            </a:br>
+            <a:r>
+              <a:rPr lang="ko-KR" altLang="en-US" dirty="0"/>
+              <a:t>미 업데이트 시 앱 스토어 노출 불가 이슈 발생으로 매 년 변경되는 요구 사항에 맞춰 업데이트를 진행 해야 함</a:t>
+            </a:r>
+            <a:endParaRPr lang="en-US" altLang="ko-KR" dirty="0"/>
           </a:p>
         </p:txBody>
       </p:sp>
@@ -5764,7 +6262,7 @@
           <p:cNvPr id="2" name="직사각형 1">
             <a:extLst>
               <a:ext uri="{FF2B5EF4-FFF2-40B4-BE49-F238E27FC236}">
-                <a16:creationId xmlns:a16="http://schemas.microsoft.com/office/drawing/2014/main" id="{3F68FD64-4438-CACB-7765-4503FE5898F0}"/>
+                <a16:creationId xmlns:a16="http://schemas.microsoft.com/office/drawing/2014/main" id="{7FA2D19F-8398-2770-2FB4-C321170BEAD3}"/>
               </a:ext>
             </a:extLst>
           </p:cNvPr>
@@ -5818,7 +6316,7 @@
           <p:cNvPr id="3" name="TextBox 2">
             <a:extLst>
               <a:ext uri="{FF2B5EF4-FFF2-40B4-BE49-F238E27FC236}">
-                <a16:creationId xmlns:a16="http://schemas.microsoft.com/office/drawing/2014/main" id="{5B596AC0-19DD-1374-AE24-9E518C229B56}"/>
+                <a16:creationId xmlns:a16="http://schemas.microsoft.com/office/drawing/2014/main" id="{E40B68F2-4A61-3729-364A-B7388C4C7717}"/>
               </a:ext>
             </a:extLst>
           </p:cNvPr>
@@ -5827,8 +6325,8 @@
         </p:nvSpPr>
         <p:spPr>
           <a:xfrm>
-            <a:off x="1120554" y="3007528"/>
-            <a:ext cx="11871545" cy="369332"/>
+            <a:off x="1120555" y="3007528"/>
+            <a:ext cx="7413845" cy="369332"/>
           </a:xfrm>
           <a:prstGeom prst="rect">
             <a:avLst/>
@@ -5856,48 +6354,10 @@
             <a:r>
               <a:rPr lang="en-US" altLang="ko-KR" b="1" dirty="0">
                 <a:effectLst/>
-                <a:latin typeface="+mn-ea"/>
-              </a:rPr>
-              <a:t>Java, Spring Boot (Spring Data JPA, Spring Security), AWS EC2, RDS, </a:t>
-            </a:r>
-            <a:r>
-              <a:rPr lang="en-US" altLang="ko-KR" b="1" dirty="0" err="1">
-                <a:effectLst/>
-                <a:latin typeface="+mn-ea"/>
-              </a:rPr>
-              <a:t>Github</a:t>
-            </a:r>
-            <a:r>
-              <a:rPr lang="en-US" altLang="ko-KR" b="1" dirty="0">
-                <a:effectLst/>
-                <a:latin typeface="+mn-ea"/>
-              </a:rPr>
-              <a:t> Action, </a:t>
-            </a:r>
-            <a:r>
-              <a:rPr lang="en-US" altLang="ko-KR" b="1" dirty="0" err="1">
-                <a:effectLst/>
-                <a:latin typeface="+mn-ea"/>
-              </a:rPr>
-              <a:t>MySql</a:t>
-            </a:r>
-            <a:r>
-              <a:rPr lang="en-US" altLang="ko-KR" b="1" dirty="0">
-                <a:effectLst/>
-                <a:latin typeface="+mn-ea"/>
-              </a:rPr>
-              <a:t> </a:t>
-            </a:r>
-            <a:r>
-              <a:rPr lang="ko-KR" altLang="en-US" b="1" dirty="0">
-                <a:effectLst/>
-                <a:latin typeface="+mn-ea"/>
-              </a:rPr>
-              <a:t>등</a:t>
-            </a:r>
-            <a:endParaRPr lang="ko-KR" altLang="en-US" b="1" dirty="0">
-              <a:latin typeface="+mn-ea"/>
-            </a:endParaRPr>
+              </a:rPr>
+              <a:t>Android Studio, Java, Android</a:t>
+            </a:r>
+            <a:endParaRPr lang="ko-KR" altLang="en-US" b="1" dirty="0"/>
           </a:p>
         </p:txBody>
       </p:sp>
@@ -5906,7 +6366,7 @@
           <p:cNvPr id="9" name="TextBox 8">
             <a:extLst>
               <a:ext uri="{FF2B5EF4-FFF2-40B4-BE49-F238E27FC236}">
-                <a16:creationId xmlns:a16="http://schemas.microsoft.com/office/drawing/2014/main" id="{D6D8F7BE-E6DD-CE2A-4284-F638D0C9B9E6}"/>
+                <a16:creationId xmlns:a16="http://schemas.microsoft.com/office/drawing/2014/main" id="{2D54C001-9DE5-B853-6B53-4A9F9AD5D2C3}"/>
               </a:ext>
             </a:extLst>
           </p:cNvPr>
@@ -5916,7 +6376,7 @@
         <p:spPr>
           <a:xfrm>
             <a:off x="1146968" y="3469193"/>
-            <a:ext cx="11235532" cy="3262432"/>
+            <a:ext cx="11235532" cy="2985433"/>
           </a:xfrm>
           <a:prstGeom prst="rect">
             <a:avLst/>
@@ -5958,15 +6418,23 @@
             </a:pPr>
             <a:r>
               <a:rPr lang="ko-KR" altLang="en-US" dirty="0"/>
-              <a:t>확정되지 않은 비즈니스 로직과 잦은 기획안 변경으로 </a:t>
-            </a:r>
-            <a:r>
-              <a:rPr lang="en-US" altLang="ko-KR" dirty="0"/>
-              <a:t>Agile </a:t>
-            </a:r>
-            <a:r>
-              <a:rPr lang="ko-KR" altLang="en-US" dirty="0"/>
-              <a:t>방법론을 적용하여 개발 진행</a:t>
+              <a:t>지속적인 </a:t>
+            </a:r>
+            <a:r>
+              <a:rPr lang="en-US" altLang="ko-KR" dirty="0"/>
+              <a:t>OS </a:t>
+            </a:r>
+            <a:r>
+              <a:rPr lang="ko-KR" altLang="en-US" dirty="0"/>
+              <a:t>업데이트 대응을 통해 </a:t>
+            </a:r>
+            <a:r>
+              <a:rPr lang="en-US" altLang="ko-KR" dirty="0"/>
+              <a:t>Google Play</a:t>
+            </a:r>
+            <a:r>
+              <a:rPr lang="ko-KR" altLang="en-US" dirty="0"/>
+              <a:t>에서 앱 서비스 진행</a:t>
             </a:r>
             <a:r>
               <a:rPr lang="en-US" altLang="ko-KR" dirty="0"/>
@@ -5974,23 +6442,7 @@
             </a:r>
             <a:r>
               <a:rPr lang="ko-KR" altLang="en-US" dirty="0"/>
-              <a:t>이를 통해 실무에 가까운 프로젝트 환경을 경험하였으며</a:t>
-            </a:r>
-            <a:r>
-              <a:rPr lang="en-US" altLang="ko-KR" dirty="0"/>
-              <a:t>, </a:t>
-            </a:r>
-            <a:r>
-              <a:rPr lang="ko-KR" altLang="en-US" dirty="0"/>
-              <a:t>실 유저가 발생한 경험을 통해 외주 담당자와 직접적으로 소통하며 </a:t>
-            </a:r>
-            <a:r>
-              <a:rPr lang="en-US" altLang="ko-KR" dirty="0"/>
-              <a:t>QA</a:t>
-            </a:r>
-            <a:r>
-              <a:rPr lang="ko-KR" altLang="en-US" dirty="0"/>
-              <a:t>를 진행</a:t>
+              <a:t>이를 통해 사용자 이탈 방지</a:t>
             </a:r>
             <a:endParaRPr lang="en-US" altLang="ko-KR" dirty="0"/>
           </a:p>
@@ -6000,46 +6452,17 @@
               <a:buChar char="•"/>
             </a:pPr>
             <a:r>
-              <a:rPr lang="en-US" altLang="ko-KR" dirty="0"/>
-              <a:t>2</a:t>
-            </a:r>
-            <a:r>
-              <a:rPr lang="ko-KR" altLang="en-US" dirty="0"/>
-              <a:t>개의 팀이 경쟁 하는 구도로 진행 하였으며</a:t>
-            </a:r>
-            <a:r>
-              <a:rPr lang="en-US" altLang="ko-KR" dirty="0"/>
-              <a:t>, </a:t>
-            </a:r>
-            <a:r>
-              <a:rPr lang="ko-KR" altLang="en-US" dirty="0"/>
-              <a:t>결과 평과 지표인 디자인</a:t>
-            </a:r>
-            <a:r>
-              <a:rPr lang="en-US" altLang="ko-KR" dirty="0"/>
-              <a:t>, </a:t>
-            </a:r>
-            <a:r>
-              <a:rPr lang="ko-KR" altLang="en-US" dirty="0"/>
-              <a:t>성능</a:t>
-            </a:r>
-            <a:r>
-              <a:rPr lang="en-US" altLang="ko-KR" dirty="0"/>
-              <a:t>, </a:t>
-            </a:r>
-            <a:r>
-              <a:rPr lang="ko-KR" altLang="en-US" dirty="0"/>
-              <a:t>기능 모두 </a:t>
-            </a:r>
-            <a:r>
-              <a:rPr lang="ko-KR" altLang="en-US" dirty="0" err="1"/>
-              <a:t>경쟁팀</a:t>
-            </a:r>
-            <a:r>
-              <a:rPr lang="ko-KR" altLang="en-US" dirty="0"/>
-              <a:t> 보다 우위를 점해 프로토 타입 배포 및 실제 서비스 런칭 진행 경험</a:t>
-            </a:r>
-            <a:endParaRPr lang="en-US" altLang="ko-KR" dirty="0"/>
+              <a:rPr lang="ko-KR" altLang="en-US" dirty="0"/>
+              <a:t>구글의 모바일 정책 변경에 능동적으로 대응</a:t>
+            </a:r>
+            <a:r>
+              <a:rPr lang="en-US" altLang="ko-KR" dirty="0"/>
+              <a:t>. </a:t>
+            </a:r>
+            <a:r>
+              <a:rPr lang="ko-KR" altLang="en-US" dirty="0"/>
+              <a:t>이를 통해 서비스 운영 경험 및 앱 배포 역량 강화</a:t>
+            </a:r>
           </a:p>
           <a:p>
             <a:pPr marR="0" lvl="0" algn="l" defTabSz="914400" rtl="0" eaLnBrk="0" fontAlgn="base" latinLnBrk="0" hangingPunct="0">
@@ -6056,6 +6479,40 @@
               <a:buSzTx/>
               <a:tabLst/>
             </a:pPr>
+            <a:endParaRPr lang="en-US" altLang="ko-KR" dirty="0"/>
+          </a:p>
+          <a:p>
+            <a:pPr marR="0" lvl="0" algn="l" defTabSz="914400" rtl="0" eaLnBrk="0" fontAlgn="base" latinLnBrk="0" hangingPunct="0">
+              <a:lnSpc>
+                <a:spcPct val="100000"/>
+              </a:lnSpc>
+              <a:spcBef>
+                <a:spcPct val="0"/>
+              </a:spcBef>
+              <a:spcAft>
+                <a:spcPct val="0"/>
+              </a:spcAft>
+              <a:buClrTx/>
+              <a:buSzTx/>
+              <a:tabLst/>
+            </a:pPr>
+            <a:endParaRPr lang="en-US" altLang="ko-KR" dirty="0"/>
+          </a:p>
+          <a:p>
+            <a:pPr marR="0" lvl="0" algn="l" defTabSz="914400" rtl="0" eaLnBrk="0" fontAlgn="base" latinLnBrk="0" hangingPunct="0">
+              <a:lnSpc>
+                <a:spcPct val="100000"/>
+              </a:lnSpc>
+              <a:spcBef>
+                <a:spcPct val="0"/>
+              </a:spcBef>
+              <a:spcAft>
+                <a:spcPct val="0"/>
+              </a:spcAft>
+              <a:buClrTx/>
+              <a:buSzTx/>
+              <a:tabLst/>
+            </a:pPr>
             <a:r>
               <a:rPr lang="ko-KR" altLang="en-US" sz="2200" b="1" dirty="0"/>
               <a:t>인사이트</a:t>
@@ -6069,7 +6526,7 @@
             </a:pPr>
             <a:r>
               <a:rPr lang="ko-KR" altLang="en-US" dirty="0"/>
-              <a:t>퇴사 후 실무에 가까운 프로젝트를 진행하며 잃었던 업무 적응력을 되찾을 수 있는 좋은 기회가 되었으며</a:t>
+              <a:t>공식 문서를 통해 정보를 취득하는 방법과 역량을 기르고</a:t>
             </a:r>
             <a:r>
               <a:rPr lang="en-US" altLang="ko-KR" dirty="0"/>
@@ -6077,7 +6534,7 @@
             </a:r>
             <a:r>
               <a:rPr lang="ko-KR" altLang="en-US" dirty="0"/>
-              <a:t>개발자의 자존감 성립 및 상태 진단을 통해 부족한 점과 필요한 것이 무엇인지 진단 해 볼 좋은 기회가 됨</a:t>
+              <a:t>이를 통해 문제에 대한 대응 및 해결 능력 함양</a:t>
             </a:r>
             <a:endParaRPr lang="en-US" altLang="ko-KR" dirty="0"/>
           </a:p>
@@ -6088,15 +6545,15 @@
             </a:pPr>
             <a:r>
               <a:rPr lang="ko-KR" altLang="en-US" dirty="0"/>
-              <a:t>특히 </a:t>
-            </a:r>
-            <a:r>
-              <a:rPr lang="en-US" altLang="ko-KR" dirty="0"/>
-              <a:t>ERD </a:t>
-            </a:r>
-            <a:r>
-              <a:rPr lang="ko-KR" altLang="en-US" dirty="0"/>
-              <a:t>설계를 진행할 때</a:t>
+              <a:t>자사 서비스 앱의 기능들에 대해 어떠한 </a:t>
+            </a:r>
+            <a:r>
+              <a:rPr lang="en-US" altLang="ko-KR" dirty="0"/>
+              <a:t>SDK API</a:t>
+            </a:r>
+            <a:r>
+              <a:rPr lang="ko-KR" altLang="en-US" dirty="0"/>
+              <a:t>를 사용하고</a:t>
             </a:r>
             <a:r>
               <a:rPr lang="en-US" altLang="ko-KR" dirty="0"/>
@@ -6104,48 +6561,16 @@
             </a:r>
             <a:r>
               <a:rPr lang="ko-KR" altLang="en-US" dirty="0"/>
-              <a:t>열심히 고민해서 </a:t>
-            </a:r>
-            <a:r>
-              <a:rPr lang="en-US" altLang="ko-KR" dirty="0"/>
-              <a:t>ERD</a:t>
-            </a:r>
-            <a:r>
-              <a:rPr lang="ko-KR" altLang="en-US" dirty="0"/>
-              <a:t>를 설계하고</a:t>
-            </a:r>
-            <a:r>
-              <a:rPr lang="en-US" altLang="ko-KR" dirty="0"/>
-              <a:t>, </a:t>
-            </a:r>
-            <a:r>
-              <a:rPr lang="ko-KR" altLang="en-US" dirty="0"/>
-              <a:t>추후 프로젝트 개발을 완료한 뒤 내가 고심하며 계획했던 내용들이 구현되었을 때 큰 성취감을 느낌</a:t>
-            </a:r>
-            <a:r>
-              <a:rPr lang="en-US" altLang="ko-KR" dirty="0"/>
-              <a:t>. </a:t>
-            </a:r>
-            <a:r>
-              <a:rPr lang="ko-KR" altLang="en-US" dirty="0"/>
-              <a:t>특히</a:t>
-            </a:r>
-            <a:r>
-              <a:rPr lang="en-US" altLang="ko-KR" dirty="0"/>
-              <a:t>, </a:t>
-            </a:r>
-            <a:r>
-              <a:rPr lang="ko-KR" altLang="en-US" dirty="0"/>
-              <a:t>확실하지 않은 기획을 통해 개발할 경우 유연성과 확장성을 고려한 </a:t>
-            </a:r>
-            <a:r>
-              <a:rPr lang="en-US" altLang="ko-KR" dirty="0"/>
-              <a:t>ERD </a:t>
-            </a:r>
-            <a:r>
-              <a:rPr lang="ko-KR" altLang="en-US" dirty="0"/>
-              <a:t>설계로 사이드 이펙트를 최소화할 수 있었던 점에서 큰 보람을 느낌</a:t>
-            </a:r>
+              <a:t>어떠한 로직으로 동작하는지 전반적인 프로세스 파악의 경험 및 추후 발생하는 이슈들에 대해 명확하고 빠른 처리가 가능한 역량 증대</a:t>
+            </a:r>
+            <a:endParaRPr lang="en-US" altLang="ko-KR" dirty="0"/>
+          </a:p>
+          <a:p>
+            <a:pPr marL="285750" indent="-285750">
+              <a:buFont typeface="Arial" panose="020B0604020202020204" pitchFamily="34" charset="0"/>
+              <a:buChar char="•"/>
+            </a:pPr>
+            <a:endParaRPr lang="ko-KR" altLang="en-US" dirty="0"/>
           </a:p>
         </p:txBody>
       </p:sp>
@@ -6154,7 +6579,7 @@
           <p:cNvPr id="6" name="직사각형 5">
             <a:extLst>
               <a:ext uri="{FF2B5EF4-FFF2-40B4-BE49-F238E27FC236}">
-                <a16:creationId xmlns:a16="http://schemas.microsoft.com/office/drawing/2014/main" id="{B76D2366-7B79-85DD-7229-A89D9F7DAB9C}"/>
+                <a16:creationId xmlns:a16="http://schemas.microsoft.com/office/drawing/2014/main" id="{204FD3C1-80D9-733A-AE46-3E47ADCEBACD}"/>
               </a:ext>
             </a:extLst>
           </p:cNvPr>
@@ -6206,7 +6631,7 @@
           <p:cNvPr id="8" name="직사각형 7">
             <a:extLst>
               <a:ext uri="{FF2B5EF4-FFF2-40B4-BE49-F238E27FC236}">
-                <a16:creationId xmlns:a16="http://schemas.microsoft.com/office/drawing/2014/main" id="{64A054CD-74A6-B978-2E65-42612E29CE73}"/>
+                <a16:creationId xmlns:a16="http://schemas.microsoft.com/office/drawing/2014/main" id="{B302C9B0-EAE9-1752-32A3-3E4D727B5D05}"/>
               </a:ext>
             </a:extLst>
           </p:cNvPr>
@@ -6258,7 +6683,7 @@
           <p:cNvPr id="10" name="직사각형 9">
             <a:extLst>
               <a:ext uri="{FF2B5EF4-FFF2-40B4-BE49-F238E27FC236}">
-                <a16:creationId xmlns:a16="http://schemas.microsoft.com/office/drawing/2014/main" id="{00A1D8EB-049F-A7A6-7FB9-4F4D193ADF33}"/>
+                <a16:creationId xmlns:a16="http://schemas.microsoft.com/office/drawing/2014/main" id="{31CFA638-B6C3-E12D-53FA-D7193BAE7D1C}"/>
               </a:ext>
             </a:extLst>
           </p:cNvPr>
@@ -6307,10 +6732,10 @@
       </p:sp>
       <p:sp>
         <p:nvSpPr>
-          <p:cNvPr id="14" name="TextBox 13">
+          <p:cNvPr id="11" name="TextBox 10">
             <a:extLst>
               <a:ext uri="{FF2B5EF4-FFF2-40B4-BE49-F238E27FC236}">
-                <a16:creationId xmlns:a16="http://schemas.microsoft.com/office/drawing/2014/main" id="{98CBBF8D-C36E-DA53-A3A2-28C4B5B9C697}"/>
+                <a16:creationId xmlns:a16="http://schemas.microsoft.com/office/drawing/2014/main" id="{0F721B66-FBB0-82F1-600D-67FECB477FCF}"/>
               </a:ext>
             </a:extLst>
           </p:cNvPr>
@@ -6319,8 +6744,8 @@
         </p:nvSpPr>
         <p:spPr>
           <a:xfrm>
-            <a:off x="1147522" y="6804351"/>
-            <a:ext cx="1351129" cy="430887"/>
+            <a:off x="1147523" y="6804351"/>
+            <a:ext cx="1691370" cy="430887"/>
           </a:xfrm>
           <a:prstGeom prst="rect">
             <a:avLst/>
@@ -6361,9 +6786,10 @@
                 <a:effectLst/>
                 <a:uLnTx/>
                 <a:uFillTx/>
-                <a:latin typeface="+mn-ea"/>
+                <a:latin typeface="+mj-ea"/>
+                <a:ea typeface="+mj-ea"/>
                 <a:cs typeface="+mn-cs"/>
-                <a:hlinkClick r:id="rId2">
+                <a:hlinkClick r:id="rId3">
                   <a:extLst>
                     <a:ext uri="{A12FA001-AC4F-418D-AE19-62706E023703}">
                       <ahyp:hlinkClr xmlns:ahyp="http://schemas.microsoft.com/office/drawing/2018/hyperlinkcolor" val="tx"/>
@@ -6383,78 +6809,8 @@
               <a:effectLst/>
               <a:uLnTx/>
               <a:uFillTx/>
-              <a:latin typeface="+mn-ea"/>
-              <a:cs typeface="+mn-cs"/>
-            </a:endParaRPr>
-          </a:p>
-        </p:txBody>
-      </p:sp>
-      <p:sp>
-        <p:nvSpPr>
-          <p:cNvPr id="15" name="TextBox 14">
-            <a:extLst>
-              <a:ext uri="{FF2B5EF4-FFF2-40B4-BE49-F238E27FC236}">
-                <a16:creationId xmlns:a16="http://schemas.microsoft.com/office/drawing/2014/main" id="{00B3B2B4-BC93-05FC-2528-00130A70E3D3}"/>
-              </a:ext>
-            </a:extLst>
-          </p:cNvPr>
-          <p:cNvSpPr txBox="1"/>
-          <p:nvPr/>
-        </p:nvSpPr>
-        <p:spPr>
-          <a:xfrm>
-            <a:off x="2622295" y="6804351"/>
-            <a:ext cx="1351129" cy="430887"/>
-          </a:xfrm>
-          <a:prstGeom prst="rect">
-            <a:avLst/>
-          </a:prstGeom>
-          <a:noFill/>
-        </p:spPr>
-        <p:txBody>
-          <a:bodyPr wrap="square" rtlCol="0">
-            <a:spAutoFit/>
-          </a:bodyPr>
-          <a:lstStyle/>
-          <a:p>
-            <a:pPr marL="0" marR="0" lvl="0" indent="0" algn="l" defTabSz="914400" rtl="0" eaLnBrk="0" fontAlgn="base" latinLnBrk="0" hangingPunct="0">
-              <a:lnSpc>
-                <a:spcPct val="100000"/>
-              </a:lnSpc>
-              <a:spcBef>
-                <a:spcPct val="0"/>
-              </a:spcBef>
-              <a:spcAft>
-                <a:spcPct val="0"/>
-              </a:spcAft>
-              <a:buClrTx/>
-              <a:buSzTx/>
-              <a:buFontTx/>
-              <a:buNone/>
-              <a:tabLst/>
-              <a:defRPr/>
-            </a:pPr>
-            <a:r>
-              <a:rPr lang="ko-KR" altLang="en-US" sz="2200" b="1" dirty="0">
-                <a:solidFill>
-                  <a:srgbClr val="508D4E"/>
-                </a:solidFill>
-                <a:latin typeface="+mn-ea"/>
-                <a:hlinkClick r:id="rId3"/>
-              </a:rPr>
-              <a:t>시연 영상</a:t>
-            </a:r>
-            <a:endParaRPr kumimoji="0" lang="en-US" altLang="ko-KR" sz="2200" b="1" i="0" u="none" strike="noStrike" kern="1200" cap="none" spc="0" normalizeH="0" baseline="0" noProof="0" dirty="0">
-              <a:ln>
-                <a:noFill/>
-              </a:ln>
-              <a:solidFill>
-                <a:srgbClr val="508D4E"/>
-              </a:solidFill>
-              <a:effectLst/>
-              <a:uLnTx/>
-              <a:uFillTx/>
-              <a:latin typeface="+mn-ea"/>
+              <a:latin typeface="+mj-ea"/>
+              <a:ea typeface="+mj-ea"/>
               <a:cs typeface="+mn-cs"/>
             </a:endParaRPr>
           </a:p>
@@ -6463,7 +6819,7 @@
     </p:spTree>
     <p:extLst>
       <p:ext uri="{BB962C8B-B14F-4D97-AF65-F5344CB8AC3E}">
-        <p14:creationId xmlns:p14="http://schemas.microsoft.com/office/powerpoint/2010/main" val="3127891094"/>
+        <p14:creationId xmlns:p14="http://schemas.microsoft.com/office/powerpoint/2010/main" val="3779721743"/>
       </p:ext>
     </p:extLst>
   </p:cSld>
@@ -10806,7 +11162,7 @@
         </p:nvSpPr>
         <p:spPr>
           <a:xfrm>
-            <a:off x="1146969" y="2020953"/>
+            <a:off x="1146969" y="2297951"/>
             <a:ext cx="5981700" cy="461665"/>
           </a:xfrm>
           <a:prstGeom prst="rect">
@@ -10846,7 +11202,7 @@
         </p:nvSpPr>
         <p:spPr>
           <a:xfrm>
-            <a:off x="1146968" y="2465504"/>
+            <a:off x="1146968" y="2742502"/>
             <a:ext cx="9559131" cy="369332"/>
           </a:xfrm>
           <a:prstGeom prst="rect">
@@ -11428,8 +11784,8 @@
         </p:nvSpPr>
         <p:spPr>
           <a:xfrm>
-            <a:off x="1146968" y="2789316"/>
-            <a:ext cx="8973777" cy="923330"/>
+            <a:off x="1146968" y="3066314"/>
+            <a:ext cx="8973777" cy="646331"/>
           </a:xfrm>
           <a:prstGeom prst="rect">
             <a:avLst/>
@@ -11441,28 +11797,6 @@
             <a:spAutoFit/>
           </a:bodyPr>
           <a:lstStyle/>
-          <a:p>
-            <a:pPr marL="285750" indent="-285750">
-              <a:buFont typeface="Arial" panose="020B0604020202020204" pitchFamily="34" charset="0"/>
-              <a:buChar char="•"/>
-            </a:pPr>
-            <a:r>
-              <a:rPr lang="ko-KR" altLang="en-US" dirty="0"/>
-              <a:t>사용 기술</a:t>
-            </a:r>
-            <a:r>
-              <a:rPr lang="en-US" altLang="ko-KR" dirty="0"/>
-              <a:t>: Spring boot, Spring </a:t>
-            </a:r>
-            <a:r>
-              <a:rPr lang="en-US" altLang="ko-KR" dirty="0" err="1"/>
-              <a:t>WebFlux</a:t>
-            </a:r>
-            <a:r>
-              <a:rPr lang="en-US" altLang="ko-KR" dirty="0"/>
-              <a:t>, Spring Security, MySQL, JWT, Docker, AWS</a:t>
-            </a:r>
-          </a:p>
           <a:p>
             <a:pPr marL="285750" indent="-285750">
               <a:buFont typeface="Arial" panose="020B0604020202020204" pitchFamily="34" charset="0"/>
@@ -11514,7 +11848,7 @@
         <p:spPr>
           <a:xfrm>
             <a:off x="1146968" y="5075768"/>
-            <a:ext cx="9049545" cy="1200329"/>
+            <a:ext cx="9049545" cy="923330"/>
           </a:xfrm>
           <a:prstGeom prst="rect">
             <a:avLst/>
@@ -11526,20 +11860,6 @@
             <a:spAutoFit/>
           </a:bodyPr>
           <a:lstStyle/>
-          <a:p>
-            <a:pPr marL="285750" indent="-285750">
-              <a:buFont typeface="Arial" panose="020B0604020202020204" pitchFamily="34" charset="0"/>
-              <a:buChar char="•"/>
-            </a:pPr>
-            <a:r>
-              <a:rPr lang="ko-KR" altLang="en-US" dirty="0"/>
-              <a:t>사용 기술</a:t>
-            </a:r>
-            <a:r>
-              <a:rPr lang="en-US" altLang="ko-KR" dirty="0"/>
-              <a:t>:Android, ASP.NET, Java, C#, asp, html, Window Server, Oracle, SQL Server</a:t>
-            </a:r>
-          </a:p>
           <a:p>
             <a:pPr marL="285750" indent="-285750">
               <a:buFont typeface="Arial" panose="020B0604020202020204" pitchFamily="34" charset="0"/>
@@ -11613,6 +11933,823 @@
 </file>
 
 <file path=ppt/slides/slide7.xml><?xml version="1.0" encoding="utf-8"?>
+<p:sld xmlns:a="http://schemas.openxmlformats.org/drawingml/2006/main" xmlns:r="http://schemas.openxmlformats.org/officeDocument/2006/relationships" xmlns:p="http://schemas.openxmlformats.org/presentationml/2006/main">
+  <p:cSld>
+    <p:spTree>
+      <p:nvGrpSpPr>
+        <p:cNvPr id="1" name="">
+          <a:extLst>
+            <a:ext uri="{FF2B5EF4-FFF2-40B4-BE49-F238E27FC236}">
+              <a16:creationId xmlns:a16="http://schemas.microsoft.com/office/drawing/2014/main" id="{A8BBC331-B298-F93C-8CDC-03F71DB0BA6B}"/>
+            </a:ext>
+          </a:extLst>
+        </p:cNvPr>
+        <p:cNvGrpSpPr/>
+        <p:nvPr/>
+      </p:nvGrpSpPr>
+      <p:grpSpPr>
+        <a:xfrm>
+          <a:off x="0" y="0"/>
+          <a:ext cx="0" cy="0"/>
+          <a:chOff x="0" y="0"/>
+          <a:chExt cx="0" cy="0"/>
+        </a:xfrm>
+      </p:grpSpPr>
+      <p:sp>
+        <p:nvSpPr>
+          <p:cNvPr id="4" name="TextBox 3">
+            <a:extLst>
+              <a:ext uri="{FF2B5EF4-FFF2-40B4-BE49-F238E27FC236}">
+                <a16:creationId xmlns:a16="http://schemas.microsoft.com/office/drawing/2014/main" id="{E009C13C-9534-D543-3ECF-66E106952DED}"/>
+              </a:ext>
+            </a:extLst>
+          </p:cNvPr>
+          <p:cNvSpPr txBox="1"/>
+          <p:nvPr/>
+        </p:nvSpPr>
+        <p:spPr>
+          <a:xfrm>
+            <a:off x="621792" y="564922"/>
+            <a:ext cx="6896608" cy="707886"/>
+          </a:xfrm>
+          <a:prstGeom prst="rect">
+            <a:avLst/>
+          </a:prstGeom>
+          <a:noFill/>
+        </p:spPr>
+        <p:txBody>
+          <a:bodyPr wrap="square" rtlCol="0">
+            <a:spAutoFit/>
+          </a:bodyPr>
+          <a:lstStyle/>
+          <a:p>
+            <a:r>
+              <a:rPr lang="en-US" altLang="ko-KR" sz="4000" b="1" dirty="0">
+                <a:solidFill>
+                  <a:srgbClr val="508D4E"/>
+                </a:solidFill>
+              </a:rPr>
+              <a:t>Projects</a:t>
+            </a:r>
+            <a:r>
+              <a:rPr lang="ko-KR" altLang="en-US" sz="4000" b="1" dirty="0">
+                <a:solidFill>
+                  <a:srgbClr val="508D4E"/>
+                </a:solidFill>
+              </a:rPr>
+              <a:t> </a:t>
+            </a:r>
+            <a:r>
+              <a:rPr lang="en-US" altLang="ko-KR" sz="4000" b="1" dirty="0">
+                <a:solidFill>
+                  <a:srgbClr val="508D4E"/>
+                </a:solidFill>
+              </a:rPr>
+              <a:t>/ ALYES</a:t>
+            </a:r>
+            <a:endParaRPr lang="ko-KR" altLang="en-US" sz="4000" b="1" dirty="0">
+              <a:solidFill>
+                <a:srgbClr val="508D4E"/>
+              </a:solidFill>
+            </a:endParaRPr>
+          </a:p>
+        </p:txBody>
+      </p:sp>
+      <p:sp>
+        <p:nvSpPr>
+          <p:cNvPr id="6" name="직사각형 5">
+            <a:extLst>
+              <a:ext uri="{FF2B5EF4-FFF2-40B4-BE49-F238E27FC236}">
+                <a16:creationId xmlns:a16="http://schemas.microsoft.com/office/drawing/2014/main" id="{B76D2366-7B79-85DD-7229-A89D9F7DAB9C}"/>
+              </a:ext>
+            </a:extLst>
+          </p:cNvPr>
+          <p:cNvSpPr/>
+          <p:nvPr/>
+        </p:nvSpPr>
+        <p:spPr>
+          <a:xfrm>
+            <a:off x="6869113" y="-495300"/>
+            <a:ext cx="3327400" cy="889653"/>
+          </a:xfrm>
+          <a:prstGeom prst="rect">
+            <a:avLst/>
+          </a:prstGeom>
+          <a:solidFill>
+            <a:srgbClr val="80AF81"/>
+          </a:solidFill>
+          <a:ln>
+            <a:noFill/>
+          </a:ln>
+        </p:spPr>
+        <p:style>
+          <a:lnRef idx="2">
+            <a:schemeClr val="accent1">
+              <a:shade val="15000"/>
+            </a:schemeClr>
+          </a:lnRef>
+          <a:fillRef idx="1">
+            <a:schemeClr val="accent1"/>
+          </a:fillRef>
+          <a:effectRef idx="0">
+            <a:schemeClr val="accent1"/>
+          </a:effectRef>
+          <a:fontRef idx="minor">
+            <a:schemeClr val="lt1"/>
+          </a:fontRef>
+        </p:style>
+        <p:txBody>
+          <a:bodyPr rtlCol="0" anchor="ctr"/>
+          <a:lstStyle/>
+          <a:p>
+            <a:pPr algn="ctr"/>
+            <a:endParaRPr lang="ko-KR" altLang="en-US" dirty="0"/>
+          </a:p>
+        </p:txBody>
+      </p:sp>
+      <p:sp>
+        <p:nvSpPr>
+          <p:cNvPr id="8" name="직사각형 7">
+            <a:extLst>
+              <a:ext uri="{FF2B5EF4-FFF2-40B4-BE49-F238E27FC236}">
+                <a16:creationId xmlns:a16="http://schemas.microsoft.com/office/drawing/2014/main" id="{64A054CD-74A6-B978-2E65-42612E29CE73}"/>
+              </a:ext>
+            </a:extLst>
+          </p:cNvPr>
+          <p:cNvSpPr/>
+          <p:nvPr/>
+        </p:nvSpPr>
+        <p:spPr>
+          <a:xfrm>
+            <a:off x="9034245" y="-495300"/>
+            <a:ext cx="3327400" cy="889653"/>
+          </a:xfrm>
+          <a:prstGeom prst="rect">
+            <a:avLst/>
+          </a:prstGeom>
+          <a:solidFill>
+            <a:srgbClr val="508D4E"/>
+          </a:solidFill>
+          <a:ln>
+            <a:noFill/>
+          </a:ln>
+        </p:spPr>
+        <p:style>
+          <a:lnRef idx="2">
+            <a:schemeClr val="accent1">
+              <a:shade val="15000"/>
+            </a:schemeClr>
+          </a:lnRef>
+          <a:fillRef idx="1">
+            <a:schemeClr val="accent1"/>
+          </a:fillRef>
+          <a:effectRef idx="0">
+            <a:schemeClr val="accent1"/>
+          </a:effectRef>
+          <a:fontRef idx="minor">
+            <a:schemeClr val="lt1"/>
+          </a:fontRef>
+        </p:style>
+        <p:txBody>
+          <a:bodyPr rtlCol="0" anchor="ctr"/>
+          <a:lstStyle/>
+          <a:p>
+            <a:pPr algn="ctr"/>
+            <a:endParaRPr lang="ko-KR" altLang="en-US"/>
+          </a:p>
+        </p:txBody>
+      </p:sp>
+      <p:sp>
+        <p:nvSpPr>
+          <p:cNvPr id="10" name="직사각형 9">
+            <a:extLst>
+              <a:ext uri="{FF2B5EF4-FFF2-40B4-BE49-F238E27FC236}">
+                <a16:creationId xmlns:a16="http://schemas.microsoft.com/office/drawing/2014/main" id="{00A1D8EB-049F-A7A6-7FB9-4F4D193ADF33}"/>
+              </a:ext>
+            </a:extLst>
+          </p:cNvPr>
+          <p:cNvSpPr/>
+          <p:nvPr/>
+        </p:nvSpPr>
+        <p:spPr>
+          <a:xfrm>
+            <a:off x="11589844" y="-495300"/>
+            <a:ext cx="3327400" cy="889653"/>
+          </a:xfrm>
+          <a:prstGeom prst="rect">
+            <a:avLst/>
+          </a:prstGeom>
+          <a:solidFill>
+            <a:srgbClr val="1A5319"/>
+          </a:solidFill>
+          <a:ln>
+            <a:noFill/>
+          </a:ln>
+        </p:spPr>
+        <p:style>
+          <a:lnRef idx="2">
+            <a:schemeClr val="accent1">
+              <a:shade val="15000"/>
+            </a:schemeClr>
+          </a:lnRef>
+          <a:fillRef idx="1">
+            <a:schemeClr val="accent1"/>
+          </a:fillRef>
+          <a:effectRef idx="0">
+            <a:schemeClr val="accent1"/>
+          </a:effectRef>
+          <a:fontRef idx="minor">
+            <a:schemeClr val="lt1"/>
+          </a:fontRef>
+        </p:style>
+        <p:txBody>
+          <a:bodyPr rtlCol="0" anchor="ctr"/>
+          <a:lstStyle/>
+          <a:p>
+            <a:pPr algn="ctr"/>
+            <a:endParaRPr lang="ko-KR" altLang="en-US"/>
+          </a:p>
+        </p:txBody>
+      </p:sp>
+      <p:sp>
+        <p:nvSpPr>
+          <p:cNvPr id="12" name="TextBox 11">
+            <a:extLst>
+              <a:ext uri="{FF2B5EF4-FFF2-40B4-BE49-F238E27FC236}">
+                <a16:creationId xmlns:a16="http://schemas.microsoft.com/office/drawing/2014/main" id="{8B1B8473-9543-5D36-F00E-616F4178A878}"/>
+              </a:ext>
+            </a:extLst>
+          </p:cNvPr>
+          <p:cNvSpPr txBox="1"/>
+          <p:nvPr/>
+        </p:nvSpPr>
+        <p:spPr>
+          <a:xfrm>
+            <a:off x="1146968" y="1246248"/>
+            <a:ext cx="10029032" cy="461665"/>
+          </a:xfrm>
+          <a:prstGeom prst="rect">
+            <a:avLst/>
+          </a:prstGeom>
+          <a:noFill/>
+        </p:spPr>
+        <p:txBody>
+          <a:bodyPr wrap="square" rtlCol="0">
+            <a:spAutoFit/>
+          </a:bodyPr>
+          <a:lstStyle/>
+          <a:p>
+            <a:r>
+              <a:rPr lang="en-US" altLang="ko-KR" sz="2400" b="1" dirty="0"/>
+              <a:t>OnePass</a:t>
+            </a:r>
+            <a:endParaRPr lang="ko-KR" altLang="en-US" sz="2400" b="1" dirty="0"/>
+          </a:p>
+        </p:txBody>
+      </p:sp>
+      <p:sp>
+        <p:nvSpPr>
+          <p:cNvPr id="13" name="TextBox 12">
+            <a:extLst>
+              <a:ext uri="{FF2B5EF4-FFF2-40B4-BE49-F238E27FC236}">
+                <a16:creationId xmlns:a16="http://schemas.microsoft.com/office/drawing/2014/main" id="{97FE9CB7-DBB3-4991-8120-C2521A30A32F}"/>
+              </a:ext>
+            </a:extLst>
+          </p:cNvPr>
+          <p:cNvSpPr txBox="1"/>
+          <p:nvPr/>
+        </p:nvSpPr>
+        <p:spPr>
+          <a:xfrm>
+            <a:off x="1146968" y="1707913"/>
+            <a:ext cx="11235532" cy="923330"/>
+          </a:xfrm>
+          <a:prstGeom prst="rect">
+            <a:avLst/>
+          </a:prstGeom>
+          <a:noFill/>
+        </p:spPr>
+        <p:txBody>
+          <a:bodyPr wrap="square" rtlCol="0">
+            <a:spAutoFit/>
+          </a:bodyPr>
+          <a:lstStyle/>
+          <a:p>
+            <a:pPr marL="285750" indent="-285750">
+              <a:buFont typeface="Arial" panose="020B0604020202020204" pitchFamily="34" charset="0"/>
+              <a:buChar char="•"/>
+            </a:pPr>
+            <a:r>
+              <a:rPr lang="ko-KR" altLang="en-US" dirty="0"/>
+              <a:t>유소년 스포츠 클럽 운영자를 위한 출결 및 셔틀</a:t>
+            </a:r>
+            <a:r>
+              <a:rPr lang="en-US" altLang="ko-KR" dirty="0"/>
+              <a:t>, </a:t>
+            </a:r>
+            <a:r>
+              <a:rPr lang="ko-KR" altLang="en-US" dirty="0"/>
+              <a:t>회비 납부 관리를 위한 웹 앱 프로그램 개발</a:t>
+            </a:r>
+            <a:r>
+              <a:rPr lang="en-US" altLang="ko-KR" dirty="0"/>
+              <a:t>.</a:t>
+            </a:r>
+          </a:p>
+          <a:p>
+            <a:pPr marL="285750" indent="-285750">
+              <a:buFont typeface="Arial" panose="020B0604020202020204" pitchFamily="34" charset="0"/>
+              <a:buChar char="•"/>
+            </a:pPr>
+            <a:r>
+              <a:rPr lang="ko-KR" altLang="en-US" dirty="0"/>
+              <a:t>개인 사업자와 영세 규모의 학원</a:t>
+            </a:r>
+            <a:r>
+              <a:rPr lang="en-US" altLang="ko-KR" dirty="0"/>
+              <a:t>, </a:t>
+            </a:r>
+            <a:r>
+              <a:rPr lang="ko-KR" altLang="en-US" dirty="0"/>
+              <a:t>스포츠 클럽 들은 수강생 관리를 수기로 하는 불편함이 존재</a:t>
+            </a:r>
+            <a:r>
+              <a:rPr lang="en-US" altLang="ko-KR" dirty="0"/>
+              <a:t>.</a:t>
+            </a:r>
+          </a:p>
+          <a:p>
+            <a:pPr marL="285750" indent="-285750">
+              <a:buFont typeface="Arial" panose="020B0604020202020204" pitchFamily="34" charset="0"/>
+              <a:buChar char="•"/>
+            </a:pPr>
+            <a:r>
+              <a:rPr lang="ko-KR" altLang="en-US" dirty="0"/>
+              <a:t>해당 업무 프로그램들을 하나로 쉽게 관리하고</a:t>
+            </a:r>
+            <a:r>
+              <a:rPr lang="en-US" altLang="ko-KR" dirty="0"/>
+              <a:t>, </a:t>
+            </a:r>
+            <a:r>
+              <a:rPr lang="ko-KR" altLang="en-US" dirty="0"/>
+              <a:t>구독료를 통해 수익 창출하는 프로젝트 진행</a:t>
+            </a:r>
+            <a:r>
+              <a:rPr lang="en-US" altLang="ko-KR" dirty="0"/>
+              <a:t>.</a:t>
+            </a:r>
+          </a:p>
+        </p:txBody>
+      </p:sp>
+      <p:sp>
+        <p:nvSpPr>
+          <p:cNvPr id="16" name="직사각형 15">
+            <a:extLst>
+              <a:ext uri="{FF2B5EF4-FFF2-40B4-BE49-F238E27FC236}">
+                <a16:creationId xmlns:a16="http://schemas.microsoft.com/office/drawing/2014/main" id="{3F68FD64-4438-CACB-7765-4503FE5898F0}"/>
+              </a:ext>
+            </a:extLst>
+          </p:cNvPr>
+          <p:cNvSpPr/>
+          <p:nvPr/>
+        </p:nvSpPr>
+        <p:spPr>
+          <a:xfrm>
+            <a:off x="1140380" y="3021473"/>
+            <a:ext cx="11242120" cy="388939"/>
+          </a:xfrm>
+          <a:prstGeom prst="rect">
+            <a:avLst/>
+          </a:prstGeom>
+          <a:solidFill>
+            <a:srgbClr val="252525">
+              <a:alpha val="10000"/>
+            </a:srgbClr>
+          </a:solidFill>
+          <a:ln>
+            <a:noFill/>
+          </a:ln>
+        </p:spPr>
+        <p:style>
+          <a:lnRef idx="2">
+            <a:schemeClr val="accent1">
+              <a:shade val="15000"/>
+            </a:schemeClr>
+          </a:lnRef>
+          <a:fillRef idx="1">
+            <a:schemeClr val="accent1"/>
+          </a:fillRef>
+          <a:effectRef idx="0">
+            <a:schemeClr val="accent1"/>
+          </a:effectRef>
+          <a:fontRef idx="minor">
+            <a:schemeClr val="lt1"/>
+          </a:fontRef>
+        </p:style>
+        <p:txBody>
+          <a:bodyPr rtlCol="0" anchor="ctr"/>
+          <a:lstStyle/>
+          <a:p>
+            <a:pPr algn="ctr"/>
+            <a:endParaRPr lang="ko-KR" altLang="en-US"/>
+          </a:p>
+        </p:txBody>
+      </p:sp>
+      <p:sp>
+        <p:nvSpPr>
+          <p:cNvPr id="17" name="TextBox 16">
+            <a:extLst>
+              <a:ext uri="{FF2B5EF4-FFF2-40B4-BE49-F238E27FC236}">
+                <a16:creationId xmlns:a16="http://schemas.microsoft.com/office/drawing/2014/main" id="{5B596AC0-19DD-1374-AE24-9E518C229B56}"/>
+              </a:ext>
+            </a:extLst>
+          </p:cNvPr>
+          <p:cNvSpPr txBox="1"/>
+          <p:nvPr/>
+        </p:nvSpPr>
+        <p:spPr>
+          <a:xfrm>
+            <a:off x="1120554" y="3021473"/>
+            <a:ext cx="11871545" cy="369332"/>
+          </a:xfrm>
+          <a:prstGeom prst="rect">
+            <a:avLst/>
+          </a:prstGeom>
+          <a:noFill/>
+        </p:spPr>
+        <p:txBody>
+          <a:bodyPr wrap="square" rtlCol="0">
+            <a:spAutoFit/>
+          </a:bodyPr>
+          <a:lstStyle/>
+          <a:p>
+            <a:r>
+              <a:rPr lang="ko-KR" altLang="en-US" sz="1800" b="1" dirty="0">
+                <a:effectLst/>
+              </a:rPr>
+              <a:t>🛠️</a:t>
+            </a:r>
+            <a:r>
+              <a:rPr lang="ko-KR" altLang="en-US" b="1" dirty="0">
+                <a:effectLst/>
+              </a:rPr>
+              <a:t> </a:t>
+            </a:r>
+            <a:r>
+              <a:rPr lang="en-US" altLang="ko-KR" b="1" dirty="0">
+                <a:effectLst/>
+                <a:latin typeface="+mn-ea"/>
+              </a:rPr>
+              <a:t>Java, Spring Boot (Spring Data JPA, Spring Security), AWS EC2, RDS, </a:t>
+            </a:r>
+            <a:r>
+              <a:rPr lang="en-US" altLang="ko-KR" b="1" dirty="0" err="1">
+                <a:effectLst/>
+                <a:latin typeface="+mn-ea"/>
+              </a:rPr>
+              <a:t>Github</a:t>
+            </a:r>
+            <a:r>
+              <a:rPr lang="en-US" altLang="ko-KR" b="1" dirty="0">
+                <a:effectLst/>
+                <a:latin typeface="+mn-ea"/>
+              </a:rPr>
+              <a:t> Action, </a:t>
+            </a:r>
+            <a:r>
+              <a:rPr lang="en-US" altLang="ko-KR" b="1" dirty="0" err="1">
+                <a:effectLst/>
+                <a:latin typeface="+mn-ea"/>
+              </a:rPr>
+              <a:t>MySql</a:t>
+            </a:r>
+            <a:r>
+              <a:rPr lang="en-US" altLang="ko-KR" b="1" dirty="0">
+                <a:effectLst/>
+                <a:latin typeface="+mn-ea"/>
+              </a:rPr>
+              <a:t> </a:t>
+            </a:r>
+            <a:r>
+              <a:rPr lang="ko-KR" altLang="en-US" b="1" dirty="0">
+                <a:effectLst/>
+                <a:latin typeface="+mn-ea"/>
+              </a:rPr>
+              <a:t>등</a:t>
+            </a:r>
+            <a:endParaRPr lang="ko-KR" altLang="en-US" b="1" dirty="0">
+              <a:latin typeface="+mn-ea"/>
+            </a:endParaRPr>
+          </a:p>
+        </p:txBody>
+      </p:sp>
+      <p:sp>
+        <p:nvSpPr>
+          <p:cNvPr id="18" name="TextBox 17">
+            <a:extLst>
+              <a:ext uri="{FF2B5EF4-FFF2-40B4-BE49-F238E27FC236}">
+                <a16:creationId xmlns:a16="http://schemas.microsoft.com/office/drawing/2014/main" id="{D6D8F7BE-E6DD-CE2A-4284-F638D0C9B9E6}"/>
+              </a:ext>
+            </a:extLst>
+          </p:cNvPr>
+          <p:cNvSpPr txBox="1"/>
+          <p:nvPr/>
+        </p:nvSpPr>
+        <p:spPr>
+          <a:xfrm>
+            <a:off x="1146968" y="3390805"/>
+            <a:ext cx="11235532" cy="1261884"/>
+          </a:xfrm>
+          <a:prstGeom prst="rect">
+            <a:avLst/>
+          </a:prstGeom>
+          <a:noFill/>
+        </p:spPr>
+        <p:txBody>
+          <a:bodyPr wrap="square" rtlCol="0">
+            <a:spAutoFit/>
+          </a:bodyPr>
+          <a:lstStyle/>
+          <a:p>
+            <a:pPr marL="0" marR="0" lvl="0" indent="0" algn="l" defTabSz="914400" rtl="0" eaLnBrk="0" fontAlgn="base" latinLnBrk="0" hangingPunct="0">
+              <a:lnSpc>
+                <a:spcPct val="100000"/>
+              </a:lnSpc>
+              <a:spcBef>
+                <a:spcPct val="0"/>
+              </a:spcBef>
+              <a:spcAft>
+                <a:spcPct val="0"/>
+              </a:spcAft>
+              <a:buClrTx/>
+              <a:buSzTx/>
+              <a:buFontTx/>
+              <a:buNone/>
+              <a:tabLst/>
+            </a:pPr>
+            <a:r>
+              <a:rPr lang="ko-KR" altLang="en-US" sz="2200" b="1" dirty="0"/>
+              <a:t>성과</a:t>
+            </a:r>
+            <a:endParaRPr lang="en-US" altLang="ko-KR" sz="2200" b="1" dirty="0"/>
+          </a:p>
+          <a:p>
+            <a:pPr marL="285750" indent="-285750">
+              <a:buFont typeface="Arial" panose="020B0604020202020204" pitchFamily="34" charset="0"/>
+              <a:buChar char="•"/>
+            </a:pPr>
+            <a:r>
+              <a:rPr lang="ko-KR" altLang="en-US" dirty="0"/>
+              <a:t>초기 서비스 기획부터 </a:t>
+            </a:r>
+            <a:r>
+              <a:rPr lang="ko-KR" altLang="en-US" dirty="0" err="1"/>
+              <a:t>아키텍팅</a:t>
+            </a:r>
+            <a:r>
+              <a:rPr lang="en-US" altLang="ko-KR" dirty="0"/>
+              <a:t>, ERD</a:t>
+            </a:r>
+            <a:r>
+              <a:rPr lang="ko-KR" altLang="en-US" dirty="0"/>
+              <a:t>와 비즈니스 로직 설계 및 이후 </a:t>
+            </a:r>
+            <a:r>
+              <a:rPr lang="en-US" altLang="ko-KR" dirty="0"/>
+              <a:t>QA </a:t>
+            </a:r>
+            <a:r>
+              <a:rPr lang="ko-KR" altLang="en-US" dirty="0"/>
+              <a:t>진행까지 전 과정 참여</a:t>
+            </a:r>
+          </a:p>
+          <a:p>
+            <a:pPr marL="285750" indent="-285750">
+              <a:buFont typeface="Arial" panose="020B0604020202020204" pitchFamily="34" charset="0"/>
+              <a:buChar char="•"/>
+            </a:pPr>
+            <a:r>
+              <a:rPr lang="en-US" altLang="ko-KR" dirty="0"/>
+              <a:t>300</a:t>
+            </a:r>
+            <a:r>
+              <a:rPr lang="ko-KR" altLang="en-US" dirty="0"/>
+              <a:t>명 이상의 회원을 관리하는 실제 스포츠 교육기관 원장을 통해 프로토타입 운영 진행</a:t>
+            </a:r>
+          </a:p>
+          <a:p>
+            <a:pPr marL="285750" indent="-285750">
+              <a:buFont typeface="Arial" panose="020B0604020202020204" pitchFamily="34" charset="0"/>
+              <a:buChar char="•"/>
+            </a:pPr>
+            <a:r>
+              <a:rPr lang="en-US" altLang="ko-KR" dirty="0"/>
+              <a:t>2</a:t>
+            </a:r>
+            <a:r>
+              <a:rPr lang="ko-KR" altLang="en-US" dirty="0"/>
+              <a:t>팀이 경쟁을 진행</a:t>
+            </a:r>
+            <a:r>
+              <a:rPr lang="en-US" altLang="ko-KR" dirty="0"/>
+              <a:t>, </a:t>
+            </a:r>
+            <a:r>
+              <a:rPr lang="ko-KR" altLang="en-US" dirty="0"/>
+              <a:t>주요 평가 지표인 디자인</a:t>
+            </a:r>
+            <a:r>
+              <a:rPr lang="en-US" altLang="ko-KR" dirty="0"/>
+              <a:t>, </a:t>
+            </a:r>
+            <a:r>
+              <a:rPr lang="ko-KR" altLang="en-US" dirty="0"/>
+              <a:t>성능</a:t>
+            </a:r>
+            <a:r>
+              <a:rPr lang="en-US" altLang="ko-KR" dirty="0"/>
+              <a:t>, </a:t>
+            </a:r>
+            <a:r>
+              <a:rPr lang="ko-KR" altLang="en-US" dirty="0"/>
+              <a:t>기능 우수로 배포 및 실제 서비스 런칭</a:t>
+            </a:r>
+          </a:p>
+        </p:txBody>
+      </p:sp>
+      <p:sp>
+        <p:nvSpPr>
+          <p:cNvPr id="19" name="TextBox 18">
+            <a:extLst>
+              <a:ext uri="{FF2B5EF4-FFF2-40B4-BE49-F238E27FC236}">
+                <a16:creationId xmlns:a16="http://schemas.microsoft.com/office/drawing/2014/main" id="{71E0AC30-1774-93A8-7A79-59A73F7C52E5}"/>
+              </a:ext>
+            </a:extLst>
+          </p:cNvPr>
+          <p:cNvSpPr txBox="1"/>
+          <p:nvPr/>
+        </p:nvSpPr>
+        <p:spPr>
+          <a:xfrm>
+            <a:off x="1146968" y="2631243"/>
+            <a:ext cx="9559131" cy="369332"/>
+          </a:xfrm>
+          <a:prstGeom prst="rect">
+            <a:avLst/>
+          </a:prstGeom>
+          <a:noFill/>
+        </p:spPr>
+        <p:txBody>
+          <a:bodyPr wrap="square" rtlCol="0">
+            <a:spAutoFit/>
+          </a:bodyPr>
+          <a:lstStyle/>
+          <a:p>
+            <a:r>
+              <a:rPr lang="ko-KR" altLang="en-US" dirty="0">
+                <a:solidFill>
+                  <a:schemeClr val="bg1">
+                    <a:lumMod val="65000"/>
+                  </a:schemeClr>
+                </a:solidFill>
+                <a:effectLst/>
+              </a:rPr>
+              <a:t>🗓️ </a:t>
+            </a:r>
+            <a:r>
+              <a:rPr lang="en-US" altLang="ko-KR" dirty="0">
+                <a:solidFill>
+                  <a:schemeClr val="bg1">
+                    <a:lumMod val="65000"/>
+                  </a:schemeClr>
+                </a:solidFill>
+                <a:effectLst/>
+              </a:rPr>
+              <a:t>2024.12 ~ 202</a:t>
+            </a:r>
+            <a:r>
+              <a:rPr lang="en-US" altLang="ko-KR" dirty="0">
+                <a:solidFill>
+                  <a:schemeClr val="bg1">
+                    <a:lumMod val="65000"/>
+                  </a:schemeClr>
+                </a:solidFill>
+              </a:rPr>
+              <a:t>5</a:t>
+            </a:r>
+            <a:r>
+              <a:rPr lang="en-US" altLang="ko-KR" dirty="0">
+                <a:solidFill>
+                  <a:schemeClr val="bg1">
+                    <a:lumMod val="65000"/>
+                  </a:schemeClr>
+                </a:solidFill>
+                <a:effectLst/>
+              </a:rPr>
+              <a:t>.02 (2</a:t>
+            </a:r>
+            <a:r>
+              <a:rPr lang="ko-KR" altLang="en-US" dirty="0">
+                <a:solidFill>
+                  <a:schemeClr val="bg1">
+                    <a:lumMod val="65000"/>
+                  </a:schemeClr>
+                </a:solidFill>
+                <a:effectLst/>
+              </a:rPr>
+              <a:t>개월</a:t>
+            </a:r>
+            <a:r>
+              <a:rPr lang="en-US" altLang="ko-KR" dirty="0">
+                <a:solidFill>
+                  <a:schemeClr val="bg1">
+                    <a:lumMod val="65000"/>
+                  </a:schemeClr>
+                </a:solidFill>
+                <a:effectLst/>
+              </a:rPr>
+              <a:t>) | 4</a:t>
+            </a:r>
+            <a:r>
+              <a:rPr lang="ko-KR" altLang="en-US" dirty="0">
+                <a:solidFill>
+                  <a:schemeClr val="bg1">
+                    <a:lumMod val="65000"/>
+                  </a:schemeClr>
+                </a:solidFill>
+                <a:effectLst/>
+              </a:rPr>
+              <a:t>명 </a:t>
+            </a:r>
+            <a:r>
+              <a:rPr lang="en-US" altLang="ko-KR" dirty="0">
+                <a:solidFill>
+                  <a:schemeClr val="bg1">
+                    <a:lumMod val="65000"/>
+                  </a:schemeClr>
+                </a:solidFill>
+                <a:effectLst/>
+              </a:rPr>
+              <a:t>| Backend | </a:t>
+            </a:r>
+            <a:r>
+              <a:rPr lang="ko-KR" altLang="en-US" dirty="0">
+                <a:solidFill>
+                  <a:schemeClr val="bg1">
+                    <a:lumMod val="65000"/>
+                  </a:schemeClr>
+                </a:solidFill>
+                <a:effectLst/>
+              </a:rPr>
+              <a:t>시연 영상 </a:t>
+            </a:r>
+            <a:r>
+              <a:rPr lang="en-US" altLang="ko-KR" dirty="0">
+                <a:solidFill>
+                  <a:schemeClr val="bg1">
+                    <a:lumMod val="65000"/>
+                  </a:schemeClr>
+                </a:solidFill>
+                <a:effectLst/>
+              </a:rPr>
+              <a:t>| </a:t>
+            </a:r>
+            <a:r>
+              <a:rPr lang="ko-KR" altLang="en-US" dirty="0">
+                <a:solidFill>
+                  <a:schemeClr val="bg1">
+                    <a:lumMod val="65000"/>
+                  </a:schemeClr>
+                </a:solidFill>
+                <a:effectLst/>
+              </a:rPr>
+              <a:t>상세 보기</a:t>
+            </a:r>
+            <a:endParaRPr lang="ko-KR" altLang="en-US" dirty="0">
+              <a:solidFill>
+                <a:schemeClr val="bg1">
+                  <a:lumMod val="65000"/>
+                </a:schemeClr>
+              </a:solidFill>
+            </a:endParaRPr>
+          </a:p>
+        </p:txBody>
+      </p:sp>
+    </p:spTree>
+    <p:extLst>
+      <p:ext uri="{BB962C8B-B14F-4D97-AF65-F5344CB8AC3E}">
+        <p14:creationId xmlns:p14="http://schemas.microsoft.com/office/powerpoint/2010/main" val="3127891094"/>
+      </p:ext>
+    </p:extLst>
+  </p:cSld>
+  <p:clrMapOvr>
+    <a:masterClrMapping/>
+  </p:clrMapOvr>
+</p:sld>
+</file>
+
+<file path=ppt/slides/slide8.xml><?xml version="1.0" encoding="utf-8"?>
 <p:sld xmlns:a="http://schemas.openxmlformats.org/drawingml/2006/main" xmlns:r="http://schemas.openxmlformats.org/officeDocument/2006/relationships" xmlns:p="http://schemas.openxmlformats.org/presentationml/2006/main">
   <p:cSld>
     <p:spTree>
@@ -12479,7 +13616,7 @@
 </p:sld>
 </file>
 
-<file path=ppt/slides/slide8.xml><?xml version="1.0" encoding="utf-8"?>
+<file path=ppt/slides/slide9.xml><?xml version="1.0" encoding="utf-8"?>
 <p:sld xmlns:a="http://schemas.openxmlformats.org/drawingml/2006/main" xmlns:r="http://schemas.openxmlformats.org/officeDocument/2006/relationships" xmlns:p="http://schemas.openxmlformats.org/presentationml/2006/main">
   <p:cSld>
     <p:spTree>
@@ -13266,1301 +14403,6 @@
     <p:extLst>
       <p:ext uri="{BB962C8B-B14F-4D97-AF65-F5344CB8AC3E}">
         <p14:creationId xmlns:p14="http://schemas.microsoft.com/office/powerpoint/2010/main" val="1700720363"/>
-      </p:ext>
-    </p:extLst>
-  </p:cSld>
-  <p:clrMapOvr>
-    <a:masterClrMapping/>
-  </p:clrMapOvr>
-</p:sld>
-</file>
-
-<file path=ppt/slides/slide9.xml><?xml version="1.0" encoding="utf-8"?>
-<p:sld xmlns:a="http://schemas.openxmlformats.org/drawingml/2006/main" xmlns:r="http://schemas.openxmlformats.org/officeDocument/2006/relationships" xmlns:p="http://schemas.openxmlformats.org/presentationml/2006/main">
-  <p:cSld>
-    <p:spTree>
-      <p:nvGrpSpPr>
-        <p:cNvPr id="1" name="">
-          <a:extLst>
-            <a:ext uri="{FF2B5EF4-FFF2-40B4-BE49-F238E27FC236}">
-              <a16:creationId xmlns:a16="http://schemas.microsoft.com/office/drawing/2014/main" id="{B99A33C7-B939-E852-7E92-64AC1B3DA295}"/>
-            </a:ext>
-          </a:extLst>
-        </p:cNvPr>
-        <p:cNvGrpSpPr/>
-        <p:nvPr/>
-      </p:nvGrpSpPr>
-      <p:grpSpPr>
-        <a:xfrm>
-          <a:off x="0" y="0"/>
-          <a:ext cx="0" cy="0"/>
-          <a:chOff x="0" y="0"/>
-          <a:chExt cx="0" cy="0"/>
-        </a:xfrm>
-      </p:grpSpPr>
-      <p:sp>
-        <p:nvSpPr>
-          <p:cNvPr id="4" name="TextBox 3">
-            <a:extLst>
-              <a:ext uri="{FF2B5EF4-FFF2-40B4-BE49-F238E27FC236}">
-                <a16:creationId xmlns:a16="http://schemas.microsoft.com/office/drawing/2014/main" id="{93B77123-1149-21F2-28BC-3236CDBFA25C}"/>
-              </a:ext>
-            </a:extLst>
-          </p:cNvPr>
-          <p:cNvSpPr txBox="1"/>
-          <p:nvPr/>
-        </p:nvSpPr>
-        <p:spPr>
-          <a:xfrm>
-            <a:off x="621792" y="564922"/>
-            <a:ext cx="6896608" cy="707886"/>
-          </a:xfrm>
-          <a:prstGeom prst="rect">
-            <a:avLst/>
-          </a:prstGeom>
-          <a:noFill/>
-        </p:spPr>
-        <p:txBody>
-          <a:bodyPr wrap="square" rtlCol="0">
-            <a:spAutoFit/>
-          </a:bodyPr>
-          <a:lstStyle/>
-          <a:p>
-            <a:pPr marL="0" marR="0" lvl="0" indent="0" algn="l" defTabSz="457200" rtl="0" eaLnBrk="1" fontAlgn="auto" latinLnBrk="0" hangingPunct="1">
-              <a:lnSpc>
-                <a:spcPct val="100000"/>
-              </a:lnSpc>
-              <a:spcBef>
-                <a:spcPts val="0"/>
-              </a:spcBef>
-              <a:spcAft>
-                <a:spcPts val="0"/>
-              </a:spcAft>
-              <a:buClrTx/>
-              <a:buSzTx/>
-              <a:buFontTx/>
-              <a:buNone/>
-              <a:tabLst/>
-              <a:defRPr/>
-            </a:pPr>
-            <a:r>
-              <a:rPr kumimoji="0" lang="en-US" altLang="ko-KR" sz="4000" b="1" i="0" u="none" strike="noStrike" kern="1200" cap="none" spc="0" normalizeH="0" baseline="0" noProof="0" dirty="0">
-                <a:ln>
-                  <a:noFill/>
-                </a:ln>
-                <a:solidFill>
-                  <a:srgbClr val="508D4E"/>
-                </a:solidFill>
-                <a:effectLst/>
-                <a:uLnTx/>
-                <a:uFillTx/>
-                <a:latin typeface="+mn-ea"/>
-                <a:cs typeface="+mn-cs"/>
-              </a:rPr>
-              <a:t>Projects / </a:t>
-            </a:r>
-            <a:r>
-              <a:rPr kumimoji="0" lang="ko-KR" altLang="en-US" sz="4000" b="1" i="0" u="none" strike="noStrike" kern="1200" cap="none" spc="0" normalizeH="0" baseline="0" noProof="0" dirty="0" err="1">
-                <a:ln>
-                  <a:noFill/>
-                </a:ln>
-                <a:solidFill>
-                  <a:srgbClr val="508D4E"/>
-                </a:solidFill>
-                <a:effectLst/>
-                <a:uLnTx/>
-                <a:uFillTx/>
-                <a:latin typeface="+mn-ea"/>
-                <a:cs typeface="+mn-cs"/>
-              </a:rPr>
-              <a:t>윈즈</a:t>
-            </a:r>
-            <a:r>
-              <a:rPr kumimoji="0" lang="ko-KR" altLang="en-US" sz="4000" b="1" i="0" u="none" strike="noStrike" kern="1200" cap="none" spc="0" normalizeH="0" baseline="0" noProof="0" dirty="0">
-                <a:ln>
-                  <a:noFill/>
-                </a:ln>
-                <a:solidFill>
-                  <a:srgbClr val="508D4E"/>
-                </a:solidFill>
-                <a:effectLst/>
-                <a:uLnTx/>
-                <a:uFillTx/>
-                <a:latin typeface="+mn-ea"/>
-                <a:cs typeface="+mn-cs"/>
-              </a:rPr>
-              <a:t> 시스템</a:t>
-            </a:r>
-          </a:p>
-        </p:txBody>
-      </p:sp>
-      <p:sp>
-        <p:nvSpPr>
-          <p:cNvPr id="5" name="TextBox 4">
-            <a:extLst>
-              <a:ext uri="{FF2B5EF4-FFF2-40B4-BE49-F238E27FC236}">
-                <a16:creationId xmlns:a16="http://schemas.microsoft.com/office/drawing/2014/main" id="{9C02A834-9E7E-AF9B-60C7-5B5BCA18EDEE}"/>
-              </a:ext>
-            </a:extLst>
-          </p:cNvPr>
-          <p:cNvSpPr txBox="1"/>
-          <p:nvPr/>
-        </p:nvSpPr>
-        <p:spPr>
-          <a:xfrm>
-            <a:off x="1146967" y="1272808"/>
-            <a:ext cx="10761497" cy="461665"/>
-          </a:xfrm>
-          <a:prstGeom prst="rect">
-            <a:avLst/>
-          </a:prstGeom>
-          <a:noFill/>
-        </p:spPr>
-        <p:txBody>
-          <a:bodyPr wrap="square" rtlCol="0">
-            <a:spAutoFit/>
-          </a:bodyPr>
-          <a:lstStyle/>
-          <a:p>
-            <a:pPr marL="0" marR="0" lvl="0" indent="0" algn="l" defTabSz="457200" rtl="0" eaLnBrk="1" fontAlgn="auto" latinLnBrk="0" hangingPunct="1">
-              <a:lnSpc>
-                <a:spcPct val="100000"/>
-              </a:lnSpc>
-              <a:spcBef>
-                <a:spcPts val="0"/>
-              </a:spcBef>
-              <a:spcAft>
-                <a:spcPts val="0"/>
-              </a:spcAft>
-              <a:buClrTx/>
-              <a:buSzTx/>
-              <a:buFontTx/>
-              <a:buNone/>
-              <a:tabLst/>
-              <a:defRPr/>
-            </a:pPr>
-            <a:r>
-              <a:rPr kumimoji="0" lang="en-US" altLang="ko-KR" sz="2400" b="1" i="0" u="none" strike="noStrike" kern="1200" cap="none" spc="0" normalizeH="0" baseline="0" noProof="0" dirty="0">
-                <a:ln>
-                  <a:noFill/>
-                </a:ln>
-                <a:solidFill>
-                  <a:prstClr val="black"/>
-                </a:solidFill>
-                <a:effectLst/>
-                <a:uLnTx/>
-                <a:uFillTx/>
-                <a:latin typeface="+mn-ea"/>
-                <a:cs typeface="+mn-cs"/>
-              </a:rPr>
-              <a:t>3. </a:t>
-            </a:r>
-            <a:r>
-              <a:rPr kumimoji="0" lang="ko-KR" altLang="en-US" sz="2400" b="1" i="0" u="none" strike="noStrike" kern="1200" cap="none" spc="0" normalizeH="0" baseline="0" noProof="0" dirty="0">
-                <a:ln>
-                  <a:noFill/>
-                </a:ln>
-                <a:solidFill>
-                  <a:prstClr val="black"/>
-                </a:solidFill>
-                <a:effectLst/>
-                <a:uLnTx/>
-                <a:uFillTx/>
-                <a:latin typeface="+mn-ea"/>
-                <a:cs typeface="+mn-cs"/>
-              </a:rPr>
-              <a:t>모바일 원격 </a:t>
-            </a:r>
-            <a:r>
-              <a:rPr kumimoji="0" lang="ko-KR" altLang="en-US" sz="2400" b="1" i="0" u="none" strike="noStrike" kern="1200" cap="none" spc="0" normalizeH="0" baseline="0" noProof="0" dirty="0" err="1">
-                <a:ln>
-                  <a:noFill/>
-                </a:ln>
-                <a:solidFill>
-                  <a:prstClr val="black"/>
-                </a:solidFill>
-                <a:effectLst/>
-                <a:uLnTx/>
-                <a:uFillTx/>
-                <a:latin typeface="+mn-ea"/>
-                <a:cs typeface="+mn-cs"/>
-              </a:rPr>
-              <a:t>점검툴</a:t>
-            </a:r>
-            <a:r>
-              <a:rPr kumimoji="0" lang="ko-KR" altLang="en-US" sz="2400" b="1" i="0" u="none" strike="noStrike" kern="1200" cap="none" spc="0" normalizeH="0" baseline="0" noProof="0" dirty="0">
-                <a:ln>
-                  <a:noFill/>
-                </a:ln>
-                <a:solidFill>
-                  <a:prstClr val="black"/>
-                </a:solidFill>
-                <a:effectLst/>
-                <a:uLnTx/>
-                <a:uFillTx/>
-                <a:latin typeface="+mn-ea"/>
-                <a:cs typeface="+mn-cs"/>
-              </a:rPr>
-              <a:t> 그리기 기능 개발 및 삼성 </a:t>
-            </a:r>
-            <a:r>
-              <a:rPr kumimoji="0" lang="en-US" altLang="ko-KR" sz="2400" b="1" i="0" u="none" strike="noStrike" kern="1200" cap="none" spc="0" normalizeH="0" baseline="0" noProof="0" dirty="0">
-                <a:ln>
-                  <a:noFill/>
-                </a:ln>
-                <a:solidFill>
-                  <a:prstClr val="black"/>
-                </a:solidFill>
-                <a:effectLst/>
-                <a:uLnTx/>
-                <a:uFillTx/>
-                <a:latin typeface="+mn-ea"/>
-                <a:cs typeface="+mn-cs"/>
-              </a:rPr>
-              <a:t>KNOX</a:t>
-            </a:r>
-            <a:r>
-              <a:rPr kumimoji="0" lang="ko-KR" altLang="en-US" sz="2400" b="1" i="0" u="none" strike="noStrike" kern="1200" cap="none" spc="0" normalizeH="0" baseline="0" noProof="0" dirty="0">
-                <a:ln>
-                  <a:noFill/>
-                </a:ln>
-                <a:solidFill>
-                  <a:prstClr val="black"/>
-                </a:solidFill>
-                <a:effectLst/>
-                <a:uLnTx/>
-                <a:uFillTx/>
-                <a:latin typeface="+mn-ea"/>
-                <a:cs typeface="+mn-cs"/>
-              </a:rPr>
-              <a:t>를 사용한 터치 기능 고도화</a:t>
-            </a:r>
-          </a:p>
-        </p:txBody>
-      </p:sp>
-      <p:sp>
-        <p:nvSpPr>
-          <p:cNvPr id="7" name="TextBox 6">
-            <a:extLst>
-              <a:ext uri="{FF2B5EF4-FFF2-40B4-BE49-F238E27FC236}">
-                <a16:creationId xmlns:a16="http://schemas.microsoft.com/office/drawing/2014/main" id="{DD825C18-D4DE-7A85-0904-A8E94AED404E}"/>
-              </a:ext>
-            </a:extLst>
-          </p:cNvPr>
-          <p:cNvSpPr txBox="1"/>
-          <p:nvPr/>
-        </p:nvSpPr>
-        <p:spPr>
-          <a:xfrm>
-            <a:off x="1146968" y="1734473"/>
-            <a:ext cx="11080474" cy="1200329"/>
-          </a:xfrm>
-          <a:prstGeom prst="rect">
-            <a:avLst/>
-          </a:prstGeom>
-          <a:noFill/>
-        </p:spPr>
-        <p:txBody>
-          <a:bodyPr wrap="square" rtlCol="0">
-            <a:spAutoFit/>
-          </a:bodyPr>
-          <a:lstStyle/>
-          <a:p>
-            <a:pPr marL="0" marR="0" lvl="0" indent="0" algn="l" defTabSz="914400" rtl="0" eaLnBrk="0" fontAlgn="base" latinLnBrk="0" hangingPunct="0">
-              <a:lnSpc>
-                <a:spcPct val="100000"/>
-              </a:lnSpc>
-              <a:spcBef>
-                <a:spcPct val="0"/>
-              </a:spcBef>
-              <a:spcAft>
-                <a:spcPct val="0"/>
-              </a:spcAft>
-              <a:buClrTx/>
-              <a:buSzTx/>
-              <a:buFontTx/>
-              <a:buNone/>
-              <a:tabLst/>
-              <a:defRPr/>
-            </a:pPr>
-            <a:r>
-              <a:rPr kumimoji="0" lang="en-US" altLang="ko-KR" sz="1800" b="0" i="0" u="none" strike="noStrike" kern="1200" cap="none" spc="0" normalizeH="0" baseline="0" noProof="0" dirty="0">
-                <a:ln>
-                  <a:noFill/>
-                </a:ln>
-                <a:solidFill>
-                  <a:prstClr val="black"/>
-                </a:solidFill>
-                <a:effectLst/>
-                <a:uLnTx/>
-                <a:uFillTx/>
-                <a:latin typeface="+mn-ea"/>
-                <a:cs typeface="+mn-cs"/>
-              </a:rPr>
-              <a:t>Google</a:t>
-            </a:r>
-            <a:r>
-              <a:rPr kumimoji="0" lang="ko-KR" altLang="en-US" sz="1800" b="0" i="0" u="none" strike="noStrike" kern="1200" cap="none" spc="0" normalizeH="0" baseline="0" noProof="0" dirty="0">
-                <a:ln>
-                  <a:noFill/>
-                </a:ln>
-                <a:solidFill>
-                  <a:prstClr val="black"/>
-                </a:solidFill>
-                <a:effectLst/>
-                <a:uLnTx/>
-                <a:uFillTx/>
-                <a:latin typeface="+mn-ea"/>
-                <a:cs typeface="+mn-cs"/>
-              </a:rPr>
-              <a:t>의 안드로이드 </a:t>
-            </a:r>
-            <a:r>
-              <a:rPr kumimoji="0" lang="en-US" altLang="ko-KR" sz="1800" b="0" i="0" u="none" strike="noStrike" kern="1200" cap="none" spc="0" normalizeH="0" baseline="0" noProof="0" dirty="0">
-                <a:ln>
-                  <a:noFill/>
-                </a:ln>
-                <a:solidFill>
-                  <a:prstClr val="black"/>
-                </a:solidFill>
-                <a:effectLst/>
-                <a:uLnTx/>
-                <a:uFillTx/>
-                <a:latin typeface="+mn-ea"/>
-                <a:cs typeface="+mn-cs"/>
-              </a:rPr>
-              <a:t>OS </a:t>
-            </a:r>
-            <a:r>
-              <a:rPr kumimoji="0" lang="ko-KR" altLang="en-US" sz="1800" b="0" i="0" u="none" strike="noStrike" kern="1200" cap="none" spc="0" normalizeH="0" baseline="0" noProof="0" dirty="0">
-                <a:ln>
-                  <a:noFill/>
-                </a:ln>
-                <a:solidFill>
-                  <a:prstClr val="black"/>
-                </a:solidFill>
-                <a:effectLst/>
-                <a:uLnTx/>
-                <a:uFillTx/>
-                <a:latin typeface="+mn-ea"/>
-                <a:cs typeface="+mn-cs"/>
-              </a:rPr>
-              <a:t>업데이트 흐름이 하드웨어 제어 </a:t>
-            </a:r>
-            <a:r>
-              <a:rPr kumimoji="0" lang="en-US" altLang="ko-KR" sz="1800" b="0" i="0" u="none" strike="noStrike" kern="1200" cap="none" spc="0" normalizeH="0" baseline="0" noProof="0" dirty="0">
-                <a:ln>
-                  <a:noFill/>
-                </a:ln>
-                <a:solidFill>
-                  <a:prstClr val="black"/>
-                </a:solidFill>
-                <a:effectLst/>
-                <a:uLnTx/>
-                <a:uFillTx/>
-                <a:latin typeface="+mn-ea"/>
-                <a:cs typeface="+mn-cs"/>
-              </a:rPr>
-              <a:t>API</a:t>
-            </a:r>
-            <a:r>
-              <a:rPr kumimoji="0" lang="ko-KR" altLang="en-US" sz="1800" b="0" i="0" u="none" strike="noStrike" kern="1200" cap="none" spc="0" normalizeH="0" baseline="0" noProof="0" dirty="0">
-                <a:ln>
-                  <a:noFill/>
-                </a:ln>
-                <a:solidFill>
-                  <a:prstClr val="black"/>
-                </a:solidFill>
-                <a:effectLst/>
-                <a:uLnTx/>
-                <a:uFillTx/>
-                <a:latin typeface="+mn-ea"/>
-                <a:cs typeface="+mn-cs"/>
-              </a:rPr>
-              <a:t>가 제한되는 추세</a:t>
-            </a:r>
-            <a:r>
-              <a:rPr kumimoji="0" lang="en-US" altLang="ko-KR" sz="1800" b="0" i="0" u="none" strike="noStrike" kern="1200" cap="none" spc="0" normalizeH="0" baseline="0" noProof="0" dirty="0">
-                <a:ln>
-                  <a:noFill/>
-                </a:ln>
-                <a:solidFill>
-                  <a:prstClr val="black"/>
-                </a:solidFill>
-                <a:effectLst/>
-                <a:uLnTx/>
-                <a:uFillTx/>
-                <a:latin typeface="+mn-ea"/>
-                <a:cs typeface="+mn-cs"/>
-              </a:rPr>
-              <a:t>.</a:t>
-            </a:r>
-          </a:p>
-          <a:p>
-            <a:pPr marL="0" marR="0" lvl="0" indent="0" algn="l" defTabSz="914400" rtl="0" eaLnBrk="0" fontAlgn="base" latinLnBrk="0" hangingPunct="0">
-              <a:lnSpc>
-                <a:spcPct val="100000"/>
-              </a:lnSpc>
-              <a:spcBef>
-                <a:spcPct val="0"/>
-              </a:spcBef>
-              <a:spcAft>
-                <a:spcPct val="0"/>
-              </a:spcAft>
-              <a:buClrTx/>
-              <a:buSzTx/>
-              <a:buFontTx/>
-              <a:buNone/>
-              <a:tabLst/>
-              <a:defRPr/>
-            </a:pPr>
-            <a:r>
-              <a:rPr kumimoji="0" lang="ko-KR" altLang="en-US" sz="1800" b="0" i="0" u="none" strike="noStrike" kern="1200" cap="none" spc="0" normalizeH="0" baseline="0" noProof="0" dirty="0">
-                <a:ln>
-                  <a:noFill/>
-                </a:ln>
-                <a:solidFill>
-                  <a:prstClr val="black"/>
-                </a:solidFill>
-                <a:effectLst/>
-                <a:uLnTx/>
-                <a:uFillTx/>
-                <a:latin typeface="+mn-ea"/>
-                <a:cs typeface="+mn-cs"/>
-              </a:rPr>
-              <a:t>이에 따라 앱의 기능들이 점점 사용할 수 없게 되어가는 상황에서 서비스 유지를 위해 기능 고도화 필요</a:t>
-            </a:r>
-            <a:r>
-              <a:rPr kumimoji="0" lang="en-US" altLang="ko-KR" sz="1800" b="0" i="0" u="none" strike="noStrike" kern="1200" cap="none" spc="0" normalizeH="0" baseline="0" noProof="0" dirty="0">
-                <a:ln>
-                  <a:noFill/>
-                </a:ln>
-                <a:solidFill>
-                  <a:prstClr val="black"/>
-                </a:solidFill>
-                <a:effectLst/>
-                <a:uLnTx/>
-                <a:uFillTx/>
-                <a:latin typeface="+mn-ea"/>
-                <a:cs typeface="+mn-cs"/>
-              </a:rPr>
-              <a:t>.</a:t>
-            </a:r>
-          </a:p>
-          <a:p>
-            <a:pPr marL="0" marR="0" lvl="0" indent="0" algn="l" defTabSz="914400" rtl="0" eaLnBrk="0" fontAlgn="base" latinLnBrk="0" hangingPunct="0">
-              <a:lnSpc>
-                <a:spcPct val="100000"/>
-              </a:lnSpc>
-              <a:spcBef>
-                <a:spcPct val="0"/>
-              </a:spcBef>
-              <a:spcAft>
-                <a:spcPct val="0"/>
-              </a:spcAft>
-              <a:buClrTx/>
-              <a:buSzTx/>
-              <a:buFontTx/>
-              <a:buNone/>
-              <a:tabLst/>
-              <a:defRPr/>
-            </a:pPr>
-            <a:r>
-              <a:rPr kumimoji="0" lang="en-US" altLang="ko-KR" sz="1800" b="0" i="0" u="none" strike="noStrike" kern="1200" cap="none" spc="0" normalizeH="0" baseline="0" noProof="0" dirty="0">
-                <a:ln>
-                  <a:noFill/>
-                </a:ln>
-                <a:solidFill>
-                  <a:prstClr val="black"/>
-                </a:solidFill>
-                <a:effectLst/>
-                <a:uLnTx/>
-                <a:uFillTx/>
-                <a:latin typeface="+mn-ea"/>
-                <a:cs typeface="+mn-cs"/>
-              </a:rPr>
-              <a:t>Google</a:t>
-            </a:r>
-            <a:r>
-              <a:rPr kumimoji="0" lang="ko-KR" altLang="en-US" sz="1800" b="0" i="0" u="none" strike="noStrike" kern="1200" cap="none" spc="0" normalizeH="0" baseline="0" noProof="0" dirty="0">
-                <a:ln>
-                  <a:noFill/>
-                </a:ln>
-                <a:solidFill>
-                  <a:prstClr val="black"/>
-                </a:solidFill>
-                <a:effectLst/>
-                <a:uLnTx/>
-                <a:uFillTx/>
-                <a:latin typeface="+mn-ea"/>
-                <a:cs typeface="+mn-cs"/>
-              </a:rPr>
-              <a:t>의 안드로이드 </a:t>
-            </a:r>
-            <a:r>
-              <a:rPr kumimoji="0" lang="en-US" altLang="ko-KR" sz="1800" b="0" i="0" u="none" strike="noStrike" kern="1200" cap="none" spc="0" normalizeH="0" baseline="0" noProof="0" dirty="0">
-                <a:ln>
-                  <a:noFill/>
-                </a:ln>
-                <a:solidFill>
-                  <a:prstClr val="black"/>
-                </a:solidFill>
-                <a:effectLst/>
-                <a:uLnTx/>
-                <a:uFillTx/>
-                <a:latin typeface="+mn-ea"/>
-                <a:cs typeface="+mn-cs"/>
-              </a:rPr>
-              <a:t>SDK</a:t>
-            </a:r>
-            <a:r>
-              <a:rPr kumimoji="0" lang="ko-KR" altLang="en-US" sz="1800" b="0" i="0" u="none" strike="noStrike" kern="1200" cap="none" spc="0" normalizeH="0" baseline="0" noProof="0" dirty="0">
-                <a:ln>
-                  <a:noFill/>
-                </a:ln>
-                <a:solidFill>
-                  <a:prstClr val="black"/>
-                </a:solidFill>
-                <a:effectLst/>
-                <a:uLnTx/>
-                <a:uFillTx/>
-                <a:latin typeface="+mn-ea"/>
-                <a:cs typeface="+mn-cs"/>
-              </a:rPr>
-              <a:t>를 넘어선 외부 </a:t>
-            </a:r>
-            <a:r>
-              <a:rPr kumimoji="0" lang="en-US" altLang="ko-KR" sz="1800" b="0" i="0" u="none" strike="noStrike" kern="1200" cap="none" spc="0" normalizeH="0" baseline="0" noProof="0" dirty="0">
-                <a:ln>
-                  <a:noFill/>
-                </a:ln>
-                <a:solidFill>
-                  <a:prstClr val="black"/>
-                </a:solidFill>
-                <a:effectLst/>
-                <a:uLnTx/>
-                <a:uFillTx/>
-                <a:latin typeface="+mn-ea"/>
-                <a:cs typeface="+mn-cs"/>
-              </a:rPr>
-              <a:t>API</a:t>
-            </a:r>
-            <a:r>
-              <a:rPr kumimoji="0" lang="ko-KR" altLang="en-US" sz="1800" b="0" i="0" u="none" strike="noStrike" kern="1200" cap="none" spc="0" normalizeH="0" baseline="0" noProof="0" dirty="0">
-                <a:ln>
-                  <a:noFill/>
-                </a:ln>
-                <a:solidFill>
-                  <a:prstClr val="black"/>
-                </a:solidFill>
-                <a:effectLst/>
-                <a:uLnTx/>
-                <a:uFillTx/>
-                <a:latin typeface="+mn-ea"/>
-                <a:cs typeface="+mn-cs"/>
-              </a:rPr>
-              <a:t>를 활용하여 기존 기능의 고도화 및 서비스 유지를 목표로 하는 프로젝트 진행</a:t>
-            </a:r>
-            <a:endParaRPr kumimoji="0" lang="en-US" altLang="ko-KR" sz="1800" b="0" i="0" u="none" strike="noStrike" kern="1200" cap="none" spc="0" normalizeH="0" baseline="0" noProof="0" dirty="0">
-              <a:ln>
-                <a:noFill/>
-              </a:ln>
-              <a:solidFill>
-                <a:prstClr val="black"/>
-              </a:solidFill>
-              <a:effectLst/>
-              <a:uLnTx/>
-              <a:uFillTx/>
-              <a:latin typeface="+mn-ea"/>
-              <a:cs typeface="+mn-cs"/>
-            </a:endParaRPr>
-          </a:p>
-        </p:txBody>
-      </p:sp>
-      <p:sp>
-        <p:nvSpPr>
-          <p:cNvPr id="2" name="직사각형 1">
-            <a:extLst>
-              <a:ext uri="{FF2B5EF4-FFF2-40B4-BE49-F238E27FC236}">
-                <a16:creationId xmlns:a16="http://schemas.microsoft.com/office/drawing/2014/main" id="{00FA6FB4-6603-7602-A99D-2A080CBEACA1}"/>
-              </a:ext>
-            </a:extLst>
-          </p:cNvPr>
-          <p:cNvSpPr/>
-          <p:nvPr/>
-        </p:nvSpPr>
-        <p:spPr>
-          <a:xfrm>
-            <a:off x="1140380" y="3007528"/>
-            <a:ext cx="11242120" cy="388939"/>
-          </a:xfrm>
-          <a:prstGeom prst="rect">
-            <a:avLst/>
-          </a:prstGeom>
-          <a:solidFill>
-            <a:srgbClr val="252525">
-              <a:alpha val="10000"/>
-            </a:srgbClr>
-          </a:solidFill>
-          <a:ln>
-            <a:noFill/>
-          </a:ln>
-        </p:spPr>
-        <p:style>
-          <a:lnRef idx="2">
-            <a:schemeClr val="accent1">
-              <a:shade val="15000"/>
-            </a:schemeClr>
-          </a:lnRef>
-          <a:fillRef idx="1">
-            <a:schemeClr val="accent1"/>
-          </a:fillRef>
-          <a:effectRef idx="0">
-            <a:schemeClr val="accent1"/>
-          </a:effectRef>
-          <a:fontRef idx="minor">
-            <a:schemeClr val="lt1"/>
-          </a:fontRef>
-        </p:style>
-        <p:txBody>
-          <a:bodyPr rtlCol="0" anchor="ctr"/>
-          <a:lstStyle/>
-          <a:p>
-            <a:pPr marL="0" marR="0" lvl="0" indent="0" algn="ctr" defTabSz="457200" rtl="0" eaLnBrk="1" fontAlgn="auto" latinLnBrk="0" hangingPunct="1">
-              <a:lnSpc>
-                <a:spcPct val="100000"/>
-              </a:lnSpc>
-              <a:spcBef>
-                <a:spcPts val="0"/>
-              </a:spcBef>
-              <a:spcAft>
-                <a:spcPts val="0"/>
-              </a:spcAft>
-              <a:buClrTx/>
-              <a:buSzTx/>
-              <a:buFontTx/>
-              <a:buNone/>
-              <a:tabLst/>
-              <a:defRPr/>
-            </a:pPr>
-            <a:endParaRPr kumimoji="0" lang="ko-KR" altLang="en-US" sz="1800" b="0" i="0" u="none" strike="noStrike" kern="1200" cap="none" spc="0" normalizeH="0" baseline="0" noProof="0">
-              <a:ln>
-                <a:noFill/>
-              </a:ln>
-              <a:solidFill>
-                <a:prstClr val="white"/>
-              </a:solidFill>
-              <a:effectLst/>
-              <a:uLnTx/>
-              <a:uFillTx/>
-              <a:ea typeface="SUIT Variable"/>
-              <a:cs typeface="+mn-cs"/>
-            </a:endParaRPr>
-          </a:p>
-        </p:txBody>
-      </p:sp>
-      <p:sp>
-        <p:nvSpPr>
-          <p:cNvPr id="3" name="TextBox 2">
-            <a:extLst>
-              <a:ext uri="{FF2B5EF4-FFF2-40B4-BE49-F238E27FC236}">
-                <a16:creationId xmlns:a16="http://schemas.microsoft.com/office/drawing/2014/main" id="{F1CD453D-CA35-8208-8295-18A52B65134D}"/>
-              </a:ext>
-            </a:extLst>
-          </p:cNvPr>
-          <p:cNvSpPr txBox="1"/>
-          <p:nvPr/>
-        </p:nvSpPr>
-        <p:spPr>
-          <a:xfrm>
-            <a:off x="1120555" y="3007528"/>
-            <a:ext cx="7413845" cy="369332"/>
-          </a:xfrm>
-          <a:prstGeom prst="rect">
-            <a:avLst/>
-          </a:prstGeom>
-          <a:noFill/>
-        </p:spPr>
-        <p:txBody>
-          <a:bodyPr wrap="square" rtlCol="0">
-            <a:spAutoFit/>
-          </a:bodyPr>
-          <a:lstStyle/>
-          <a:p>
-            <a:pPr marL="0" marR="0" lvl="0" indent="0" algn="l" defTabSz="457200" rtl="0" eaLnBrk="1" fontAlgn="auto" latinLnBrk="0" hangingPunct="1">
-              <a:lnSpc>
-                <a:spcPct val="100000"/>
-              </a:lnSpc>
-              <a:spcBef>
-                <a:spcPts val="0"/>
-              </a:spcBef>
-              <a:spcAft>
-                <a:spcPts val="0"/>
-              </a:spcAft>
-              <a:buClrTx/>
-              <a:buSzTx/>
-              <a:buFontTx/>
-              <a:buNone/>
-              <a:tabLst/>
-              <a:defRPr/>
-            </a:pPr>
-            <a:r>
-              <a:rPr lang="ko-KR" altLang="en-US" sz="1800" b="1" dirty="0">
-                <a:effectLst/>
-              </a:rPr>
-              <a:t>🛠️</a:t>
-            </a:r>
-            <a:r>
-              <a:rPr kumimoji="0" lang="ko-KR" altLang="en-US" sz="1800" b="1" i="0" u="none" strike="noStrike" kern="1200" cap="none" spc="0" normalizeH="0" baseline="0" noProof="0" dirty="0">
-                <a:ln>
-                  <a:noFill/>
-                </a:ln>
-                <a:solidFill>
-                  <a:prstClr val="black"/>
-                </a:solidFill>
-                <a:effectLst/>
-                <a:uLnTx/>
-                <a:uFillTx/>
-                <a:ea typeface="SUIT Variable"/>
-                <a:cs typeface="+mn-cs"/>
-              </a:rPr>
-              <a:t> </a:t>
-            </a:r>
-            <a:r>
-              <a:rPr kumimoji="0" lang="en-US" altLang="ko-KR" sz="1800" b="1" i="0" u="none" strike="noStrike" kern="1200" cap="none" spc="0" normalizeH="0" baseline="0" noProof="0" dirty="0">
-                <a:ln>
-                  <a:noFill/>
-                </a:ln>
-                <a:solidFill>
-                  <a:prstClr val="black"/>
-                </a:solidFill>
-                <a:effectLst/>
-                <a:uLnTx/>
-                <a:uFillTx/>
-                <a:latin typeface="+mn-ea"/>
-                <a:cs typeface="+mn-cs"/>
-              </a:rPr>
-              <a:t>Android Studio, Java, Android</a:t>
-            </a:r>
-            <a:endParaRPr kumimoji="0" lang="ko-KR" altLang="en-US" sz="1800" b="1" i="0" u="none" strike="noStrike" kern="1200" cap="none" spc="0" normalizeH="0" baseline="0" noProof="0" dirty="0">
-              <a:ln>
-                <a:noFill/>
-              </a:ln>
-              <a:solidFill>
-                <a:prstClr val="black"/>
-              </a:solidFill>
-              <a:effectLst/>
-              <a:uLnTx/>
-              <a:uFillTx/>
-              <a:latin typeface="+mn-ea"/>
-              <a:cs typeface="+mn-cs"/>
-            </a:endParaRPr>
-          </a:p>
-        </p:txBody>
-      </p:sp>
-      <p:sp>
-        <p:nvSpPr>
-          <p:cNvPr id="9" name="TextBox 8">
-            <a:extLst>
-              <a:ext uri="{FF2B5EF4-FFF2-40B4-BE49-F238E27FC236}">
-                <a16:creationId xmlns:a16="http://schemas.microsoft.com/office/drawing/2014/main" id="{473A745E-A442-1B75-0AE2-C7BD4734F127}"/>
-              </a:ext>
-            </a:extLst>
-          </p:cNvPr>
-          <p:cNvSpPr txBox="1"/>
-          <p:nvPr/>
-        </p:nvSpPr>
-        <p:spPr>
-          <a:xfrm>
-            <a:off x="1146967" y="3469193"/>
-            <a:ext cx="11335655" cy="2985433"/>
-          </a:xfrm>
-          <a:prstGeom prst="rect">
-            <a:avLst/>
-          </a:prstGeom>
-          <a:noFill/>
-        </p:spPr>
-        <p:txBody>
-          <a:bodyPr wrap="square" rtlCol="0">
-            <a:spAutoFit/>
-          </a:bodyPr>
-          <a:lstStyle/>
-          <a:p>
-            <a:pPr marL="0" marR="0" lvl="0" indent="0" algn="l" defTabSz="914400" rtl="0" eaLnBrk="0" fontAlgn="base" latinLnBrk="0" hangingPunct="0">
-              <a:lnSpc>
-                <a:spcPct val="100000"/>
-              </a:lnSpc>
-              <a:spcBef>
-                <a:spcPct val="0"/>
-              </a:spcBef>
-              <a:spcAft>
-                <a:spcPct val="0"/>
-              </a:spcAft>
-              <a:buClrTx/>
-              <a:buSzTx/>
-              <a:buFontTx/>
-              <a:buNone/>
-              <a:tabLst/>
-              <a:defRPr/>
-            </a:pPr>
-            <a:r>
-              <a:rPr kumimoji="0" lang="ko-KR" altLang="en-US" sz="2200" b="1" i="0" u="none" strike="noStrike" kern="1200" cap="none" spc="0" normalizeH="0" baseline="0" noProof="0" dirty="0">
-                <a:ln>
-                  <a:noFill/>
-                </a:ln>
-                <a:solidFill>
-                  <a:prstClr val="black"/>
-                </a:solidFill>
-                <a:effectLst/>
-                <a:uLnTx/>
-                <a:uFillTx/>
-                <a:latin typeface="+mn-ea"/>
-                <a:cs typeface="+mn-cs"/>
-              </a:rPr>
-              <a:t>성과</a:t>
-            </a:r>
-            <a:endParaRPr kumimoji="0" lang="en-US" altLang="ko-KR" sz="2200" b="1" i="0" u="none" strike="noStrike" kern="1200" cap="none" spc="0" normalizeH="0" baseline="0" noProof="0" dirty="0">
-              <a:ln>
-                <a:noFill/>
-              </a:ln>
-              <a:solidFill>
-                <a:prstClr val="black"/>
-              </a:solidFill>
-              <a:effectLst/>
-              <a:uLnTx/>
-              <a:uFillTx/>
-              <a:latin typeface="+mn-ea"/>
-              <a:cs typeface="+mn-cs"/>
-            </a:endParaRPr>
-          </a:p>
-          <a:p>
-            <a:pPr marL="285750" indent="-285750">
-              <a:buFont typeface="Arial" panose="020B0604020202020204" pitchFamily="34" charset="0"/>
-              <a:buChar char="•"/>
-            </a:pPr>
-            <a:r>
-              <a:rPr lang="ko-KR" altLang="en-US" dirty="0"/>
-              <a:t>미리 입력 해 놓은 터치 이벤트만 실행하는 기존의 제한적인 기능에서 상담사의 터치 이벤트를 완벽 구현하도록 개발</a:t>
-            </a:r>
-            <a:endParaRPr lang="en-US" altLang="ko-KR" dirty="0"/>
-          </a:p>
-          <a:p>
-            <a:pPr marL="285750" indent="-285750">
-              <a:buFont typeface="Arial" panose="020B0604020202020204" pitchFamily="34" charset="0"/>
-              <a:buChar char="•"/>
-            </a:pPr>
-            <a:r>
-              <a:rPr lang="en-US" altLang="ko-KR" dirty="0"/>
-              <a:t>Android SDK</a:t>
-            </a:r>
-            <a:r>
-              <a:rPr lang="ko-KR" altLang="en-US" dirty="0"/>
-              <a:t>만으로는 불가능한 기능을 외부 플랫폼 활용으로 극복</a:t>
-            </a:r>
-            <a:r>
-              <a:rPr lang="en-US" altLang="ko-KR" dirty="0"/>
-              <a:t>. </a:t>
-            </a:r>
-            <a:r>
-              <a:rPr lang="ko-KR" altLang="en-US" dirty="0"/>
-              <a:t>삼성 단말 대상 기능을 고도화 하여 국내 점유율이 높은 갤럭시 기반 앱 기능성을 강화</a:t>
-            </a:r>
-            <a:r>
-              <a:rPr lang="en-US" altLang="ko-KR" dirty="0"/>
-              <a:t>. </a:t>
-            </a:r>
-            <a:r>
-              <a:rPr lang="ko-KR" altLang="en-US" dirty="0"/>
-              <a:t>또한 해당 </a:t>
-            </a:r>
-            <a:r>
-              <a:rPr lang="en-US" altLang="ko-KR" dirty="0"/>
-              <a:t>API</a:t>
-            </a:r>
-            <a:r>
-              <a:rPr lang="ko-KR" altLang="en-US" dirty="0"/>
-              <a:t> 향후 활용을 위한 기반 확보</a:t>
-            </a:r>
-          </a:p>
-          <a:p>
-            <a:pPr marL="0" marR="0" lvl="0" indent="0" algn="l" defTabSz="914400" rtl="0" eaLnBrk="0" fontAlgn="base" latinLnBrk="0" hangingPunct="0">
-              <a:lnSpc>
-                <a:spcPct val="100000"/>
-              </a:lnSpc>
-              <a:spcBef>
-                <a:spcPct val="0"/>
-              </a:spcBef>
-              <a:spcAft>
-                <a:spcPct val="0"/>
-              </a:spcAft>
-              <a:buClrTx/>
-              <a:buSzTx/>
-              <a:buFontTx/>
-              <a:buNone/>
-              <a:tabLst/>
-              <a:defRPr/>
-            </a:pPr>
-            <a:endParaRPr kumimoji="0" lang="en-US" altLang="ko-KR" sz="1800" b="0" i="0" u="none" strike="noStrike" kern="1200" cap="none" spc="0" normalizeH="0" baseline="0" noProof="0" dirty="0">
-              <a:ln>
-                <a:noFill/>
-              </a:ln>
-              <a:solidFill>
-                <a:prstClr val="black"/>
-              </a:solidFill>
-              <a:effectLst/>
-              <a:uLnTx/>
-              <a:uFillTx/>
-              <a:ea typeface="SUIT Variable"/>
-              <a:cs typeface="+mn-cs"/>
-            </a:endParaRPr>
-          </a:p>
-          <a:p>
-            <a:pPr marL="0" marR="0" lvl="0" indent="0" algn="l" defTabSz="914400" rtl="0" eaLnBrk="0" fontAlgn="base" latinLnBrk="0" hangingPunct="0">
-              <a:lnSpc>
-                <a:spcPct val="100000"/>
-              </a:lnSpc>
-              <a:spcBef>
-                <a:spcPct val="0"/>
-              </a:spcBef>
-              <a:spcAft>
-                <a:spcPct val="0"/>
-              </a:spcAft>
-              <a:buClrTx/>
-              <a:buSzTx/>
-              <a:buFontTx/>
-              <a:buNone/>
-              <a:tabLst/>
-              <a:defRPr/>
-            </a:pPr>
-            <a:r>
-              <a:rPr kumimoji="0" lang="ko-KR" altLang="en-US" sz="2200" b="1" i="0" u="none" strike="noStrike" kern="1200" cap="none" spc="0" normalizeH="0" baseline="0" noProof="0" dirty="0">
-                <a:ln>
-                  <a:noFill/>
-                </a:ln>
-                <a:solidFill>
-                  <a:prstClr val="black"/>
-                </a:solidFill>
-                <a:effectLst/>
-                <a:uLnTx/>
-                <a:uFillTx/>
-                <a:latin typeface="+mn-ea"/>
-                <a:cs typeface="+mn-cs"/>
-              </a:rPr>
-              <a:t>인사이트</a:t>
-            </a:r>
-            <a:endParaRPr kumimoji="0" lang="en-US" altLang="ko-KR" sz="2200" b="1" i="0" u="none" strike="noStrike" kern="1200" cap="none" spc="0" normalizeH="0" baseline="0" noProof="0" dirty="0">
-              <a:ln>
-                <a:noFill/>
-              </a:ln>
-              <a:solidFill>
-                <a:prstClr val="black"/>
-              </a:solidFill>
-              <a:effectLst/>
-              <a:uLnTx/>
-              <a:uFillTx/>
-              <a:latin typeface="+mn-ea"/>
-              <a:cs typeface="+mn-cs"/>
-            </a:endParaRPr>
-          </a:p>
-          <a:p>
-            <a:pPr marL="285750" indent="-285750">
-              <a:buFont typeface="Arial" panose="020B0604020202020204" pitchFamily="34" charset="0"/>
-              <a:buChar char="•"/>
-            </a:pPr>
-            <a:r>
-              <a:rPr lang="ko-KR" altLang="en-US" dirty="0"/>
-              <a:t>대기업에서 만든 라이브러리 사용 및 공식 문서를 통해 어떻게 개발을 진행해야 하는지에 대한 경험</a:t>
-            </a:r>
-            <a:r>
-              <a:rPr lang="en-US" altLang="ko-KR" dirty="0"/>
-              <a:t>. </a:t>
-            </a:r>
-            <a:r>
-              <a:rPr lang="ko-KR" altLang="en-US" dirty="0"/>
-              <a:t>막연한 두려움 보다</a:t>
-            </a:r>
-            <a:r>
-              <a:rPr lang="en-US" altLang="ko-KR" dirty="0"/>
-              <a:t>, </a:t>
-            </a:r>
-            <a:r>
-              <a:rPr lang="ko-KR" altLang="en-US" dirty="0"/>
-              <a:t>자료조사 → 분석 → 구현을 통한 체계적인 개발 진행</a:t>
-            </a:r>
-            <a:endParaRPr lang="en-US" altLang="ko-KR" dirty="0"/>
-          </a:p>
-          <a:p>
-            <a:pPr marL="285750" indent="-285750">
-              <a:buFont typeface="Arial" panose="020B0604020202020204" pitchFamily="34" charset="0"/>
-              <a:buChar char="•"/>
-            </a:pPr>
-            <a:r>
-              <a:rPr lang="ko-KR" altLang="en-US" dirty="0"/>
-              <a:t>다른 사람이 할 수 있으면 나도 할 수 있다는 자신감을 함양</a:t>
-            </a:r>
-            <a:r>
-              <a:rPr lang="en-US" altLang="ko-KR" dirty="0"/>
-              <a:t>. </a:t>
-            </a:r>
-            <a:r>
-              <a:rPr lang="ko-KR" altLang="en-US" dirty="0"/>
-              <a:t>기술적 제약 환경에서도 문제 해결을 위한 다양한 접근 방식을 습득하고</a:t>
-            </a:r>
-            <a:r>
-              <a:rPr lang="en-US" altLang="ko-KR" dirty="0"/>
-              <a:t>, </a:t>
-            </a:r>
-            <a:r>
-              <a:rPr lang="ko-KR" altLang="en-US" dirty="0"/>
-              <a:t>안된다는 불안감 보단 구현 가능을 생각하며 조사하는 자세를 통해 개발 역량 증대</a:t>
-            </a:r>
-          </a:p>
-        </p:txBody>
-      </p:sp>
-      <p:sp>
-        <p:nvSpPr>
-          <p:cNvPr id="6" name="직사각형 5">
-            <a:extLst>
-              <a:ext uri="{FF2B5EF4-FFF2-40B4-BE49-F238E27FC236}">
-                <a16:creationId xmlns:a16="http://schemas.microsoft.com/office/drawing/2014/main" id="{45281449-081E-0BAD-7E4E-3C52BDAB9BEF}"/>
-              </a:ext>
-            </a:extLst>
-          </p:cNvPr>
-          <p:cNvSpPr/>
-          <p:nvPr/>
-        </p:nvSpPr>
-        <p:spPr>
-          <a:xfrm>
-            <a:off x="6869113" y="-495300"/>
-            <a:ext cx="3327400" cy="889653"/>
-          </a:xfrm>
-          <a:prstGeom prst="rect">
-            <a:avLst/>
-          </a:prstGeom>
-          <a:solidFill>
-            <a:srgbClr val="80AF81"/>
-          </a:solidFill>
-          <a:ln>
-            <a:noFill/>
-          </a:ln>
-        </p:spPr>
-        <p:style>
-          <a:lnRef idx="2">
-            <a:schemeClr val="accent1">
-              <a:shade val="15000"/>
-            </a:schemeClr>
-          </a:lnRef>
-          <a:fillRef idx="1">
-            <a:schemeClr val="accent1"/>
-          </a:fillRef>
-          <a:effectRef idx="0">
-            <a:schemeClr val="accent1"/>
-          </a:effectRef>
-          <a:fontRef idx="minor">
-            <a:schemeClr val="lt1"/>
-          </a:fontRef>
-        </p:style>
-        <p:txBody>
-          <a:bodyPr rtlCol="0" anchor="ctr"/>
-          <a:lstStyle/>
-          <a:p>
-            <a:pPr algn="ctr"/>
-            <a:endParaRPr lang="ko-KR" altLang="en-US" dirty="0"/>
-          </a:p>
-        </p:txBody>
-      </p:sp>
-      <p:sp>
-        <p:nvSpPr>
-          <p:cNvPr id="8" name="직사각형 7">
-            <a:extLst>
-              <a:ext uri="{FF2B5EF4-FFF2-40B4-BE49-F238E27FC236}">
-                <a16:creationId xmlns:a16="http://schemas.microsoft.com/office/drawing/2014/main" id="{54E0BDBA-3415-FD76-F0BD-4BE95D4C1562}"/>
-              </a:ext>
-            </a:extLst>
-          </p:cNvPr>
-          <p:cNvSpPr/>
-          <p:nvPr/>
-        </p:nvSpPr>
-        <p:spPr>
-          <a:xfrm>
-            <a:off x="9034245" y="-495300"/>
-            <a:ext cx="3327400" cy="889653"/>
-          </a:xfrm>
-          <a:prstGeom prst="rect">
-            <a:avLst/>
-          </a:prstGeom>
-          <a:solidFill>
-            <a:srgbClr val="508D4E"/>
-          </a:solidFill>
-          <a:ln>
-            <a:noFill/>
-          </a:ln>
-        </p:spPr>
-        <p:style>
-          <a:lnRef idx="2">
-            <a:schemeClr val="accent1">
-              <a:shade val="15000"/>
-            </a:schemeClr>
-          </a:lnRef>
-          <a:fillRef idx="1">
-            <a:schemeClr val="accent1"/>
-          </a:fillRef>
-          <a:effectRef idx="0">
-            <a:schemeClr val="accent1"/>
-          </a:effectRef>
-          <a:fontRef idx="minor">
-            <a:schemeClr val="lt1"/>
-          </a:fontRef>
-        </p:style>
-        <p:txBody>
-          <a:bodyPr rtlCol="0" anchor="ctr"/>
-          <a:lstStyle/>
-          <a:p>
-            <a:pPr algn="ctr"/>
-            <a:endParaRPr lang="ko-KR" altLang="en-US"/>
-          </a:p>
-        </p:txBody>
-      </p:sp>
-      <p:sp>
-        <p:nvSpPr>
-          <p:cNvPr id="10" name="직사각형 9">
-            <a:extLst>
-              <a:ext uri="{FF2B5EF4-FFF2-40B4-BE49-F238E27FC236}">
-                <a16:creationId xmlns:a16="http://schemas.microsoft.com/office/drawing/2014/main" id="{CC5A836E-214F-958C-B8DB-1811E632B5EC}"/>
-              </a:ext>
-            </a:extLst>
-          </p:cNvPr>
-          <p:cNvSpPr/>
-          <p:nvPr/>
-        </p:nvSpPr>
-        <p:spPr>
-          <a:xfrm>
-            <a:off x="11589844" y="-495300"/>
-            <a:ext cx="3327400" cy="889653"/>
-          </a:xfrm>
-          <a:prstGeom prst="rect">
-            <a:avLst/>
-          </a:prstGeom>
-          <a:solidFill>
-            <a:srgbClr val="1A5319"/>
-          </a:solidFill>
-          <a:ln>
-            <a:noFill/>
-          </a:ln>
-        </p:spPr>
-        <p:style>
-          <a:lnRef idx="2">
-            <a:schemeClr val="accent1">
-              <a:shade val="15000"/>
-            </a:schemeClr>
-          </a:lnRef>
-          <a:fillRef idx="1">
-            <a:schemeClr val="accent1"/>
-          </a:fillRef>
-          <a:effectRef idx="0">
-            <a:schemeClr val="accent1"/>
-          </a:effectRef>
-          <a:fontRef idx="minor">
-            <a:schemeClr val="lt1"/>
-          </a:fontRef>
-        </p:style>
-        <p:txBody>
-          <a:bodyPr rtlCol="0" anchor="ctr"/>
-          <a:lstStyle/>
-          <a:p>
-            <a:pPr algn="ctr"/>
-            <a:endParaRPr lang="ko-KR" altLang="en-US"/>
-          </a:p>
-        </p:txBody>
-      </p:sp>
-      <p:sp>
-        <p:nvSpPr>
-          <p:cNvPr id="11" name="TextBox 10">
-            <a:extLst>
-              <a:ext uri="{FF2B5EF4-FFF2-40B4-BE49-F238E27FC236}">
-                <a16:creationId xmlns:a16="http://schemas.microsoft.com/office/drawing/2014/main" id="{CCF4EFA6-7296-ADE7-007B-CE0D15FAEC1E}"/>
-              </a:ext>
-            </a:extLst>
-          </p:cNvPr>
-          <p:cNvSpPr txBox="1"/>
-          <p:nvPr/>
-        </p:nvSpPr>
-        <p:spPr>
-          <a:xfrm>
-            <a:off x="1147523" y="6804351"/>
-            <a:ext cx="1393658" cy="430887"/>
-          </a:xfrm>
-          <a:prstGeom prst="rect">
-            <a:avLst/>
-          </a:prstGeom>
-          <a:noFill/>
-        </p:spPr>
-        <p:txBody>
-          <a:bodyPr wrap="square" rtlCol="0">
-            <a:spAutoFit/>
-          </a:bodyPr>
-          <a:lstStyle/>
-          <a:p>
-            <a:pPr marL="0" marR="0" lvl="0" indent="0" algn="l" defTabSz="914400" rtl="0" eaLnBrk="0" fontAlgn="base" latinLnBrk="0" hangingPunct="0">
-              <a:lnSpc>
-                <a:spcPct val="100000"/>
-              </a:lnSpc>
-              <a:spcBef>
-                <a:spcPct val="0"/>
-              </a:spcBef>
-              <a:spcAft>
-                <a:spcPct val="0"/>
-              </a:spcAft>
-              <a:buClrTx/>
-              <a:buSzTx/>
-              <a:buFontTx/>
-              <a:buNone/>
-              <a:tabLst/>
-              <a:defRPr/>
-            </a:pPr>
-            <a:r>
-              <a:rPr kumimoji="0" lang="ko-KR" altLang="en-US" sz="2200" b="1" i="0" u="none" strike="noStrike" kern="1200" cap="none" spc="0" normalizeH="0" baseline="0" noProof="0" dirty="0">
-                <a:ln>
-                  <a:noFill/>
-                </a:ln>
-                <a:solidFill>
-                  <a:srgbClr val="508D4E"/>
-                </a:solidFill>
-                <a:effectLst/>
-                <a:uLnTx/>
-                <a:uFillTx/>
-                <a:latin typeface="+mn-ea"/>
-                <a:cs typeface="+mn-cs"/>
-                <a:hlinkClick r:id="rId2">
-                  <a:extLst>
-                    <a:ext uri="{A12FA001-AC4F-418D-AE19-62706E023703}">
-                      <ahyp:hlinkClr xmlns:ahyp="http://schemas.microsoft.com/office/drawing/2018/hyperlinkcolor" val="tx"/>
-                    </a:ext>
-                  </a:extLst>
-                </a:hlinkClick>
-              </a:rPr>
-              <a:t>상세 보기</a:t>
-            </a:r>
-            <a:endParaRPr kumimoji="0" lang="en-US" altLang="ko-KR" sz="2200" b="1" i="0" u="none" strike="noStrike" kern="1200" cap="none" spc="0" normalizeH="0" baseline="0" noProof="0" dirty="0">
-              <a:ln>
-                <a:noFill/>
-              </a:ln>
-              <a:solidFill>
-                <a:srgbClr val="508D4E"/>
-              </a:solidFill>
-              <a:effectLst/>
-              <a:uLnTx/>
-              <a:uFillTx/>
-              <a:latin typeface="+mn-ea"/>
-              <a:cs typeface="+mn-cs"/>
-            </a:endParaRPr>
-          </a:p>
-        </p:txBody>
-      </p:sp>
-    </p:spTree>
-    <p:extLst>
-      <p:ext uri="{BB962C8B-B14F-4D97-AF65-F5344CB8AC3E}">
-        <p14:creationId xmlns:p14="http://schemas.microsoft.com/office/powerpoint/2010/main" val="3834249452"/>
       </p:ext>
     </p:extLst>
   </p:cSld>
